--- a/lecons/F4/45_F4_M2_L35_Pastoral_Agriculture_in_Cameroon.pptx
+++ b/lecons/F4/45_F4_M2_L35_Pastoral_Agriculture_in_Cameroon.pptx
@@ -3103,7 +3103,7 @@
           <a:p>
             <a:r>
               <a:rPr lang="en-US" dirty="0"/>
-              <a:t>Let us copy Ranching. Modern ranching in Cameroon has the following characteristics. On this slide we have Location and Methods. Write each point on a new line, with the key term first, and explain it in your own words when we revise.</a:t>
+              <a:t>Let us copy Ranching. The location and characteristics of modern ranching in Cameroon are the following. On this slide we have Location and Methods. Write each point on a new line, with the key term first, and explain it in your own words when we revise.</a:t>
             </a:r>
             <a:endParaRPr lang="en-US" dirty="0"/>
           </a:p>
@@ -12859,7 +12859,7 @@
         <p:spPr>
           <a:xfrm>
             <a:off x="0" y="658368"/>
-            <a:ext cx="2468880" cy="5833872"/>
+            <a:ext cx="5120640" cy="5833872"/>
           </a:xfrm>
           <a:prstGeom prst="rect">
             <a:avLst/>
@@ -12874,8 +12874,8 @@
         </p:nvSpPr>
         <p:spPr>
           <a:xfrm>
-            <a:off x="2697480" y="1005840"/>
-            <a:ext cx="9174175" cy="731520"/>
+            <a:off x="5349240" y="1005840"/>
+            <a:ext cx="6522415" cy="731520"/>
           </a:xfrm>
           <a:prstGeom prst="rect">
             <a:avLst/>
@@ -12915,8 +12915,8 @@
         </p:nvSpPr>
         <p:spPr>
           <a:xfrm>
-            <a:off x="2697480" y="1783080"/>
-            <a:ext cx="9174175" cy="4663440"/>
+            <a:off x="5349240" y="1783080"/>
+            <a:ext cx="6522415" cy="4663440"/>
           </a:xfrm>
           <a:prstGeom prst="rect">
             <a:avLst/>
@@ -12935,7 +12935,7 @@
               <a:buNone/>
             </a:pPr>
             <a:r>
-              <a:rPr lang="en-US" sz="4000" b="1" dirty="0">
+              <a:rPr lang="en-US" sz="3200" b="1" dirty="0">
                 <a:solidFill>
                   <a:srgbClr val="111111"/>
                 </a:solidFill>
@@ -12945,7 +12945,7 @@
               </a:rPr>
               <a:t>Topic: Managing Resources for Development through Economic Activities</a:t>
             </a:r>
-            <a:endParaRPr lang="en-US" sz="4000" dirty="0"/>
+            <a:endParaRPr lang="en-US" sz="3200" dirty="0"/>
           </a:p>
           <a:p>
             <a:pPr algn="l" indent="0" marL="0">
@@ -12955,7 +12955,7 @@
               <a:buNone/>
             </a:pPr>
             <a:r>
-              <a:rPr lang="en-US" sz="4000" b="1" dirty="0">
+              <a:rPr lang="en-US" sz="3200" b="1" dirty="0">
                 <a:solidFill>
                   <a:srgbClr val="111111"/>
                 </a:solidFill>
@@ -12965,7 +12965,7 @@
               </a:rPr>
               <a:t>Sub-topic: The Economic Development Potentials of Cameroon in the Primary Sector: Agriculture</a:t>
             </a:r>
-            <a:endParaRPr lang="en-US" sz="4000" dirty="0"/>
+            <a:endParaRPr lang="en-US" sz="3200" dirty="0"/>
           </a:p>
           <a:p>
             <a:pPr algn="l" indent="0" marL="0">
@@ -12975,7 +12975,7 @@
               <a:buNone/>
             </a:pPr>
             <a:r>
-              <a:rPr lang="en-US" sz="4000" b="1" dirty="0">
+              <a:rPr lang="en-US" sz="3200" b="1" dirty="0">
                 <a:solidFill>
                   <a:srgbClr val="990011"/>
                 </a:solidFill>
@@ -12985,7 +12985,7 @@
               </a:rPr>
               <a:t>Lesson 35: Pastoral Agriculture in Cameroon</a:t>
             </a:r>
-            <a:endParaRPr lang="en-US" sz="4000" dirty="0"/>
+            <a:endParaRPr lang="en-US" sz="3200" dirty="0"/>
           </a:p>
         </p:txBody>
       </p:sp>
@@ -13667,7 +13667,7 @@
         <p:spPr>
           <a:xfrm>
             <a:off x="0" y="658368"/>
-            <a:ext cx="2468880" cy="5833872"/>
+            <a:ext cx="1463040" cy="5833872"/>
           </a:xfrm>
           <a:prstGeom prst="rect">
             <a:avLst/>
@@ -13682,8 +13682,8 @@
         </p:nvSpPr>
         <p:spPr>
           <a:xfrm>
-            <a:off x="2697480" y="1005840"/>
-            <a:ext cx="9174175" cy="731520"/>
+            <a:off x="1691640" y="1005840"/>
+            <a:ext cx="10180015" cy="731520"/>
           </a:xfrm>
           <a:prstGeom prst="rect">
             <a:avLst/>
@@ -13723,8 +13723,8 @@
         </p:nvSpPr>
         <p:spPr>
           <a:xfrm>
-            <a:off x="2697480" y="1783080"/>
-            <a:ext cx="9174175" cy="4663440"/>
+            <a:off x="1691640" y="1783080"/>
+            <a:ext cx="10180015" cy="4663440"/>
           </a:xfrm>
           <a:prstGeom prst="rect">
             <a:avLst/>
@@ -13751,7 +13751,7 @@
                 <a:ea typeface="Times New Roman" pitchFamily="34" charset="-122"/>
                 <a:cs typeface="Times New Roman" pitchFamily="34" charset="-120"/>
               </a:rPr>
-              <a:t>Modern ranching in Cameroon has the following characteristics:</a:t>
+              <a:t>The location and characteristics of modern ranching in Cameroon are the following:</a:t>
             </a:r>
             <a:endParaRPr lang="en-US" sz="4000" dirty="0"/>
           </a:p>

--- a/lecons/F4/45_F4_M2_L35_Pastoral_Agriculture_in_Cameroon.pptx
+++ b/lecons/F4/45_F4_M2_L35_Pastoral_Agriculture_in_Cameroon.pptx
@@ -55,9 +55,11 @@
     <p:sldId id="303" r:id="rId49"/>
     <p:sldId id="304" r:id="rId50"/>
     <p:sldId id="305" r:id="rId51"/>
+    <p:sldId id="306" r:id="rId52"/>
+    <p:sldId id="307" r:id="rId53"/>
   </p:sldIdLst>
   <p:notesMasterIdLst>
-    <p:notesMasterId r:id="rId52"/>
+    <p:notesMasterId r:id="rId54"/>
   </p:notesMasterIdLst>
   <p:sldSz cx="12192000" cy="6858000"/>
   <p:notesSz cx="6858000" cy="12192000"/>
@@ -3191,7 +3193,7 @@
           <a:p>
             <a:r>
               <a:rPr lang="en-US" dirty="0"/>
-              <a:t>Let us copy Importance and Problems. Pastoral farming has the following importance and problems. On this slide we have Importance. Write each point on a new line, with the key term first, and explain it in your own words when we revise. When you finish, we go to the next slide.</a:t>
+              <a:t>Let us copy Importance. Pastoral farming is important for the following reasons. On this slide we have Food and Hides and skins. Write each point on a new line, with the key term first, and explain it in your own words when we revise. When you finish, we go to the next slide.</a:t>
             </a:r>
             <a:endParaRPr lang="en-US" dirty="0"/>
           </a:p>
@@ -3279,7 +3281,7 @@
           <a:p>
             <a:r>
               <a:rPr lang="en-US" dirty="0"/>
-              <a:t>We continue with Importance and Problems. On this slide we have Problems. Write each point on a new line, with the key term first, and explain it in your own words when we revise.</a:t>
+              <a:t>We continue with Importance. On this slide we have Income and exports. Write each point on a new line, with the key term first, and explain it in your own words when we revise.</a:t>
             </a:r>
             <a:endParaRPr lang="en-US" dirty="0"/>
           </a:p>
@@ -3367,7 +3369,7 @@
           <a:p>
             <a:r>
               <a:rPr lang="en-US" dirty="0"/>
-              <a:t>Now let us check what you have understood. Question 1: Distinguish nomadism and ranching. Answer in your exercise book.</a:t>
+              <a:t>Let us copy Problems. Pastoral farming faces the following problems. On this slide we have Drought, Animal diseases and Cattle theft. Write each point on a new line, with the key term first, and explain it in your own words when we revise. When you finish, we go to the next slide.</a:t>
             </a:r>
             <a:endParaRPr lang="en-US" dirty="0"/>
           </a:p>
@@ -3543,7 +3545,7 @@
           <a:p>
             <a:r>
               <a:rPr lang="en-US" dirty="0"/>
-              <a:t>The expected answer is: nomadism moves with herds; ranching keeps them on fenced farms. If you got it right, well done.</a:t>
+              <a:t>We continue with Problems. On this slide we have Farmer–herder conflicts. Write each point on a new line, with the key term first, and explain it in your own words when we revise.</a:t>
             </a:r>
             <a:endParaRPr lang="en-US" dirty="0"/>
           </a:p>
@@ -3631,7 +3633,7 @@
           <a:p>
             <a:r>
               <a:rPr lang="en-US" dirty="0"/>
-              <a:t>Now let us check what you have understood. Question 2: Give two problems of pastoral farming. Answer in your exercise book.</a:t>
+              <a:t>Now let us check what you have understood. Question 1: Distinguish nomadism and ranching. Answer in your exercise book.</a:t>
             </a:r>
             <a:endParaRPr lang="en-US" dirty="0"/>
           </a:p>
@@ -3719,7 +3721,7 @@
           <a:p>
             <a:r>
               <a:rPr lang="en-US" dirty="0"/>
-              <a:t>The expected answer is: diseases and farmer–herder conflicts. If you got it right, well done.</a:t>
+              <a:t>The expected answer is: nomadism moves with herds; ranching keeps them on fenced farms. If you got it right, well done.</a:t>
             </a:r>
             <a:endParaRPr lang="en-US" dirty="0"/>
           </a:p>
@@ -3807,7 +3809,7 @@
           <a:p>
             <a:r>
               <a:rPr lang="en-US" dirty="0"/>
-              <a:t>For those who need more practice, fill in the blanks in your exercise book. The answers are: number 1, transhumance; number 2, ranch; number 3, Adamawa.</a:t>
+              <a:t>Now let us check what you have understood. Question 2: Give two problems of pastoral farming. Answer in your exercise book.</a:t>
             </a:r>
             <a:endParaRPr lang="en-US" dirty="0"/>
           </a:p>
@@ -3895,7 +3897,7 @@
           <a:p>
             <a:r>
               <a:rPr lang="en-US" dirty="0"/>
-              <a:t>For your homework: Propose two solutions to farmer–herder conflicts in the North. We shall correct it at the beginning of our next lesson.</a:t>
+              <a:t>The expected answer is: diseases and farmer–herder conflicts. If you got it right, well done.</a:t>
             </a:r>
             <a:endParaRPr lang="en-US" dirty="0"/>
           </a:p>
@@ -3983,7 +3985,7 @@
           <a:p>
             <a:r>
               <a:rPr lang="en-US" dirty="0"/>
-              <a:t>Our next lesson will be on Lesson 36: The Impact of Agriculture on the Economy of Cameroon. Thank you for your attention, and see you next time.</a:t>
+              <a:t>For those who need more practice, fill in the blanks in your exercise book. The answers are: number 1, transhumance; number 2, ranch; number 3, Adamawa.</a:t>
             </a:r>
             <a:endParaRPr lang="en-US" dirty="0"/>
           </a:p>
@@ -4071,7 +4073,7 @@
           <a:p>
             <a:r>
               <a:rPr lang="en-US" dirty="0"/>
-              <a:t>Let us play the bilingual game. I say a word in English, and you give me the French word. Then we do the reverse.</a:t>
+              <a:t>For your homework: Propose two solutions to farmer–herder conflicts in the North. We shall correct it at the beginning of our next lesson.</a:t>
             </a:r>
             <a:endParaRPr lang="en-US" dirty="0"/>
           </a:p>
@@ -4159,7 +4161,7 @@
           <a:p>
             <a:r>
               <a:rPr lang="en-US" dirty="0"/>
-              <a:t>I record this information in the official logbook of the class after the lesson.</a:t>
+              <a:t>Our next lesson will be on Lesson 36: The Impact of Agriculture on the Economy of Cameroon. Thank you for your attention, and see you next time.</a:t>
             </a:r>
             <a:endParaRPr lang="en-US" dirty="0"/>
           </a:p>
@@ -4247,7 +4249,7 @@
           <a:p>
             <a:r>
               <a:rPr lang="en-US" dirty="0"/>
-              <a:t>I complete the second page of the logbook: the matter taught, the evaluation, the homework and the attendance.</a:t>
+              <a:t>Let us play the bilingual game. I say a word in English, and you give me the French word. Then we do the reverse.</a:t>
             </a:r>
             <a:endParaRPr lang="en-US" dirty="0"/>
           </a:p>
@@ -4335,7 +4337,7 @@
           <a:p>
             <a:r>
               <a:rPr lang="en-US" dirty="0"/>
-              <a:t>This slide is for me, the teacher: it gives the timing of the lesson and what to do if the projector is not available.</a:t>
+              <a:t>I record this information in the official logbook of the class after the lesson.</a:t>
             </a:r>
             <a:endParaRPr lang="en-US" dirty="0"/>
           </a:p>
@@ -4511,7 +4513,7 @@
           <a:p>
             <a:r>
               <a:rPr lang="en-US" dirty="0"/>
-              <a:t>These are the references and picture credits used to prepare this lesson.</a:t>
+              <a:t>I complete the second page of the logbook: the matter taught, the evaluation, the homework and the attendance.</a:t>
             </a:r>
             <a:endParaRPr lang="en-US" dirty="0"/>
           </a:p>
@@ -4535,6 +4537,182 @@
             <a:fld id="{F7021451-1387-4CA6-816F-3879F97B5CBC}" type="slidenum">
               <a:rPr lang="en-US"/>
               <a:t>50</a:t>
+            </a:fld>
+            <a:endParaRPr lang="en-US"/>
+          </a:p>
+        </p:txBody>
+      </p:sp>
+    </p:spTree>
+    <p:extLst>
+      <p:ext uri="{BB962C8B-B14F-4D97-AF65-F5344CB8AC3E}">
+        <p14:creationId xmlns:p14="http://schemas.microsoft.com/office/powerpoint/2010/main" val="1024086991"/>
+      </p:ext>
+    </p:extLst>
+  </p:cSld>
+  <p:clrMapOvr>
+    <a:masterClrMapping/>
+  </p:clrMapOvr>
+</p:notes>
+</file>
+
+<file path=ppt/notesSlides/notesSlide51.xml><?xml version="1.0" encoding="utf-8"?>
+<p:notes xmlns:a="http://schemas.openxmlformats.org/drawingml/2006/main" xmlns:r="http://schemas.openxmlformats.org/officeDocument/2006/relationships" xmlns:p="http://schemas.openxmlformats.org/presentationml/2006/main">
+  <p:cSld>
+    <p:spTree>
+      <p:nvGrpSpPr>
+        <p:cNvPr id="1" name=""/>
+        <p:cNvGrpSpPr/>
+        <p:nvPr/>
+      </p:nvGrpSpPr>
+      <p:grpSpPr>
+        <a:xfrm>
+          <a:off x="0" y="0"/>
+          <a:ext cx="0" cy="0"/>
+          <a:chOff x="0" y="0"/>
+          <a:chExt cx="0" cy="0"/>
+        </a:xfrm>
+      </p:grpSpPr>
+      <p:sp>
+        <p:nvSpPr>
+          <p:cNvPr id="2" name="Slide Image Placeholder 1"/>
+          <p:cNvSpPr>
+            <a:spLocks noGrp="1" noRot="1" noChangeAspect="1"/>
+          </p:cNvSpPr>
+          <p:nvPr>
+            <p:ph type="sldImg"/>
+          </p:nvPr>
+        </p:nvSpPr>
+        <p:spPr/>
+      </p:sp>
+      <p:sp>
+        <p:nvSpPr>
+          <p:cNvPr id="3" name="Notes Placeholder 2"/>
+          <p:cNvSpPr>
+            <a:spLocks noGrp="1"/>
+          </p:cNvSpPr>
+          <p:nvPr>
+            <p:ph type="body" idx="1"/>
+          </p:nvPr>
+        </p:nvSpPr>
+        <p:spPr/>
+        <p:txBody>
+          <a:bodyPr/>
+          <a:lstStyle/>
+          <a:p>
+            <a:r>
+              <a:rPr lang="en-US" dirty="0"/>
+              <a:t>This slide is for me, the teacher: it gives the timing of the lesson and what to do if the projector is not available.</a:t>
+            </a:r>
+            <a:endParaRPr lang="en-US" dirty="0"/>
+          </a:p>
+        </p:txBody>
+      </p:sp>
+      <p:sp>
+        <p:nvSpPr>
+          <p:cNvPr id="4" name="Slide Number Placeholder 3"/>
+          <p:cNvSpPr>
+            <a:spLocks noGrp="1"/>
+          </p:cNvSpPr>
+          <p:nvPr>
+            <p:ph type="sldNum" sz="quarter" idx="10"/>
+          </p:nvPr>
+        </p:nvSpPr>
+        <p:spPr/>
+        <p:txBody>
+          <a:bodyPr/>
+          <a:lstStyle/>
+          <a:p>
+            <a:fld id="{F7021451-1387-4CA6-816F-3879F97B5CBC}" type="slidenum">
+              <a:rPr lang="en-US"/>
+              <a:t>51</a:t>
+            </a:fld>
+            <a:endParaRPr lang="en-US"/>
+          </a:p>
+        </p:txBody>
+      </p:sp>
+    </p:spTree>
+    <p:extLst>
+      <p:ext uri="{BB962C8B-B14F-4D97-AF65-F5344CB8AC3E}">
+        <p14:creationId xmlns:p14="http://schemas.microsoft.com/office/powerpoint/2010/main" val="1024086991"/>
+      </p:ext>
+    </p:extLst>
+  </p:cSld>
+  <p:clrMapOvr>
+    <a:masterClrMapping/>
+  </p:clrMapOvr>
+</p:notes>
+</file>
+
+<file path=ppt/notesSlides/notesSlide52.xml><?xml version="1.0" encoding="utf-8"?>
+<p:notes xmlns:a="http://schemas.openxmlformats.org/drawingml/2006/main" xmlns:r="http://schemas.openxmlformats.org/officeDocument/2006/relationships" xmlns:p="http://schemas.openxmlformats.org/presentationml/2006/main">
+  <p:cSld>
+    <p:spTree>
+      <p:nvGrpSpPr>
+        <p:cNvPr id="1" name=""/>
+        <p:cNvGrpSpPr/>
+        <p:nvPr/>
+      </p:nvGrpSpPr>
+      <p:grpSpPr>
+        <a:xfrm>
+          <a:off x="0" y="0"/>
+          <a:ext cx="0" cy="0"/>
+          <a:chOff x="0" y="0"/>
+          <a:chExt cx="0" cy="0"/>
+        </a:xfrm>
+      </p:grpSpPr>
+      <p:sp>
+        <p:nvSpPr>
+          <p:cNvPr id="2" name="Slide Image Placeholder 1"/>
+          <p:cNvSpPr>
+            <a:spLocks noGrp="1" noRot="1" noChangeAspect="1"/>
+          </p:cNvSpPr>
+          <p:nvPr>
+            <p:ph type="sldImg"/>
+          </p:nvPr>
+        </p:nvSpPr>
+        <p:spPr/>
+      </p:sp>
+      <p:sp>
+        <p:nvSpPr>
+          <p:cNvPr id="3" name="Notes Placeholder 2"/>
+          <p:cNvSpPr>
+            <a:spLocks noGrp="1"/>
+          </p:cNvSpPr>
+          <p:nvPr>
+            <p:ph type="body" idx="1"/>
+          </p:nvPr>
+        </p:nvSpPr>
+        <p:spPr/>
+        <p:txBody>
+          <a:bodyPr/>
+          <a:lstStyle/>
+          <a:p>
+            <a:r>
+              <a:rPr lang="en-US" dirty="0"/>
+              <a:t>These are the references and picture credits used to prepare this lesson.</a:t>
+            </a:r>
+            <a:endParaRPr lang="en-US" dirty="0"/>
+          </a:p>
+        </p:txBody>
+      </p:sp>
+      <p:sp>
+        <p:nvSpPr>
+          <p:cNvPr id="4" name="Slide Number Placeholder 3"/>
+          <p:cNvSpPr>
+            <a:spLocks noGrp="1"/>
+          </p:cNvSpPr>
+          <p:nvPr>
+            <p:ph type="sldNum" sz="quarter" idx="10"/>
+          </p:nvPr>
+        </p:nvSpPr>
+        <p:spPr/>
+        <p:txBody>
+          <a:bodyPr/>
+          <a:lstStyle/>
+          <a:p>
+            <a:fld id="{F7021451-1387-4CA6-816F-3879F97B5CBC}" type="slidenum">
+              <a:rPr lang="en-US"/>
+              <a:t>52</a:t>
             </a:fld>
             <a:endParaRPr lang="en-US"/>
           </a:p>
@@ -13960,7 +14138,7 @@
         <p:spPr>
           <a:xfrm>
             <a:off x="0" y="658368"/>
-            <a:ext cx="5120640" cy="5833872"/>
+            <a:ext cx="3840480" cy="5833872"/>
           </a:xfrm>
           <a:prstGeom prst="rect">
             <a:avLst/>
@@ -13975,8 +14153,8 @@
         </p:nvSpPr>
         <p:spPr>
           <a:xfrm>
-            <a:off x="5349240" y="1005840"/>
-            <a:ext cx="6522415" cy="731520"/>
+            <a:off x="4069080" y="1005840"/>
+            <a:ext cx="7802575" cy="731520"/>
           </a:xfrm>
           <a:prstGeom prst="rect">
             <a:avLst/>
@@ -14016,8 +14194,47 @@
         </p:nvSpPr>
         <p:spPr>
           <a:xfrm>
-            <a:off x="5349240" y="1783080"/>
-            <a:ext cx="6522415" cy="4663440"/>
+            <a:off x="4069080" y="1737360"/>
+            <a:ext cx="7802575" cy="457200"/>
+          </a:xfrm>
+          <a:prstGeom prst="rect">
+            <a:avLst/>
+          </a:prstGeom>
+          <a:noFill/>
+          <a:ln/>
+        </p:spPr>
+        <p:txBody>
+          <a:bodyPr wrap="square" lIns="0" tIns="0" rIns="0" bIns="0" rtlCol="0" anchor="ctr"/>
+          <a:lstStyle/>
+          <a:p>
+            <a:pPr algn="l" indent="0" marL="0">
+              <a:buNone/>
+            </a:pPr>
+            <a:r>
+              <a:rPr lang="en-US" sz="3200" b="1" dirty="0">
+                <a:solidFill>
+                  <a:srgbClr val="990011"/>
+                </a:solidFill>
+                <a:latin typeface="Times New Roman" pitchFamily="34" charset="0"/>
+                <a:ea typeface="Times New Roman" pitchFamily="34" charset="-122"/>
+                <a:cs typeface="Times New Roman" pitchFamily="34" charset="-120"/>
+              </a:rPr>
+              <a:t>A) Importance</a:t>
+            </a:r>
+            <a:endParaRPr lang="en-US" sz="3200" dirty="0"/>
+          </a:p>
+        </p:txBody>
+      </p:sp>
+      <p:sp>
+        <p:nvSpPr>
+          <p:cNvPr id="6" name="Text 3"/>
+          <p:cNvSpPr/>
+          <p:nvPr/>
+        </p:nvSpPr>
+        <p:spPr>
+          <a:xfrm>
+            <a:off x="4069080" y="2240280"/>
+            <a:ext cx="7802575" cy="4206240"/>
           </a:xfrm>
           <a:prstGeom prst="rect">
             <a:avLst/>
@@ -14044,7 +14261,7 @@
                 <a:ea typeface="Times New Roman" pitchFamily="34" charset="-122"/>
                 <a:cs typeface="Times New Roman" pitchFamily="34" charset="-120"/>
               </a:rPr>
-              <a:t>Pastoral farming has the following importance and problems:</a:t>
+              <a:t>Pastoral farming is important for the following reasons:</a:t>
             </a:r>
             <a:endParaRPr lang="en-US" sz="4000" dirty="0"/>
           </a:p>
@@ -14064,7 +14281,7 @@
                 <a:ea typeface="Times New Roman" pitchFamily="34" charset="-122"/>
                 <a:cs typeface="Times New Roman" pitchFamily="34" charset="-120"/>
               </a:rPr>
-              <a:t>Importance: </a:t>
+              <a:t>Food: </a:t>
             </a:r>
             <a:pPr algn="l" indent="0" marL="0">
               <a:spcAft>
@@ -14081,7 +14298,44 @@
                 <a:ea typeface="Times New Roman" pitchFamily="34" charset="-122"/>
                 <a:cs typeface="Times New Roman" pitchFamily="34" charset="-120"/>
               </a:rPr>
-              <a:t>It gives meat, milk, hides and income, and cattle are sold to Nigeria and Gabon.</a:t>
+              <a:t>It gives meat and milk.</a:t>
+            </a:r>
+            <a:endParaRPr lang="en-US" sz="4000" dirty="0"/>
+          </a:p>
+          <a:p>
+            <a:pPr algn="l" indent="0" marL="0">
+              <a:spcAft>
+                <a:spcPts val="800"/>
+              </a:spcAft>
+              <a:buNone/>
+            </a:pPr>
+            <a:r>
+              <a:rPr lang="en-US" sz="4000" b="1" dirty="0">
+                <a:solidFill>
+                  <a:srgbClr val="111111"/>
+                </a:solidFill>
+                <a:latin typeface="Times New Roman" pitchFamily="34" charset="0"/>
+                <a:ea typeface="Times New Roman" pitchFamily="34" charset="-122"/>
+                <a:cs typeface="Times New Roman" pitchFamily="34" charset="-120"/>
+              </a:rPr>
+              <a:t>Hides and skins: </a:t>
+            </a:r>
+            <a:pPr algn="l" indent="0" marL="0">
+              <a:spcAft>
+                <a:spcPts val="800"/>
+              </a:spcAft>
+              <a:buNone/>
+            </a:pPr>
+            <a:r>
+              <a:rPr lang="en-US" sz="4000" dirty="0">
+                <a:solidFill>
+                  <a:srgbClr val="111111"/>
+                </a:solidFill>
+                <a:latin typeface="Times New Roman" pitchFamily="34" charset="0"/>
+                <a:ea typeface="Times New Roman" pitchFamily="34" charset="-122"/>
+                <a:cs typeface="Times New Roman" pitchFamily="34" charset="-120"/>
+              </a:rPr>
+              <a:t>They are used to make leather.</a:t>
             </a:r>
             <a:endParaRPr lang="en-US" sz="4000" dirty="0"/>
           </a:p>
@@ -14258,7 +14512,7 @@
                 <a:ea typeface="Times New Roman" pitchFamily="34" charset="-122"/>
                 <a:cs typeface="Times New Roman" pitchFamily="34" charset="-120"/>
               </a:rPr>
-              <a:t>3. Importance and Problems (continued)</a:t>
+              <a:t>3. Importance and Problems</a:t>
             </a:r>
             <a:endParaRPr lang="en-US" sz="3600" dirty="0"/>
           </a:p>
@@ -14272,8 +14526,47 @@
         </p:nvSpPr>
         <p:spPr>
           <a:xfrm>
-            <a:off x="5349240" y="1783080"/>
-            <a:ext cx="6522415" cy="4663440"/>
+            <a:off x="5349240" y="1737360"/>
+            <a:ext cx="6522415" cy="457200"/>
+          </a:xfrm>
+          <a:prstGeom prst="rect">
+            <a:avLst/>
+          </a:prstGeom>
+          <a:noFill/>
+          <a:ln/>
+        </p:spPr>
+        <p:txBody>
+          <a:bodyPr wrap="square" lIns="0" tIns="0" rIns="0" bIns="0" rtlCol="0" anchor="ctr"/>
+          <a:lstStyle/>
+          <a:p>
+            <a:pPr algn="l" indent="0" marL="0">
+              <a:buNone/>
+            </a:pPr>
+            <a:r>
+              <a:rPr lang="en-US" sz="3200" b="1" dirty="0">
+                <a:solidFill>
+                  <a:srgbClr val="990011"/>
+                </a:solidFill>
+                <a:latin typeface="Times New Roman" pitchFamily="34" charset="0"/>
+                <a:ea typeface="Times New Roman" pitchFamily="34" charset="-122"/>
+                <a:cs typeface="Times New Roman" pitchFamily="34" charset="-120"/>
+              </a:rPr>
+              <a:t>A) Importance (continued)</a:t>
+            </a:r>
+            <a:endParaRPr lang="en-US" sz="3200" dirty="0"/>
+          </a:p>
+        </p:txBody>
+      </p:sp>
+      <p:sp>
+        <p:nvSpPr>
+          <p:cNvPr id="6" name="Text 3"/>
+          <p:cNvSpPr/>
+          <p:nvPr/>
+        </p:nvSpPr>
+        <p:spPr>
+          <a:xfrm>
+            <a:off x="5349240" y="2240280"/>
+            <a:ext cx="6522415" cy="4206240"/>
           </a:xfrm>
           <a:prstGeom prst="rect">
             <a:avLst/>
@@ -14300,7 +14593,7 @@
                 <a:ea typeface="Times New Roman" pitchFamily="34" charset="-122"/>
                 <a:cs typeface="Times New Roman" pitchFamily="34" charset="-120"/>
               </a:rPr>
-              <a:t>Problems: </a:t>
+              <a:t>Income and exports: </a:t>
             </a:r>
             <a:pPr algn="l" indent="0" marL="0">
               <a:spcAft>
@@ -14317,7 +14610,7 @@
                 <a:ea typeface="Times New Roman" pitchFamily="34" charset="-122"/>
                 <a:cs typeface="Times New Roman" pitchFamily="34" charset="-120"/>
               </a:rPr>
-              <a:t>Drought, animal diseases, cattle theft and farmer–herder conflicts reduce production.</a:t>
+              <a:t>Cattle are sold in Cameroon and to Nigeria and Gabon.</a:t>
             </a:r>
             <a:endParaRPr lang="en-US" sz="4000" dirty="0"/>
           </a:p>
@@ -14429,7 +14722,7 @@
                 <a:ea typeface="Calibri" pitchFamily="34" charset="-122"/>
                 <a:cs typeface="Calibri" pitchFamily="34" charset="-120"/>
               </a:rPr>
-              <a:t>FORMATIVE EVALUATION</a:t>
+              <a:t>BOARD SUMMARY</a:t>
             </a:r>
             <a:endParaRPr lang="en-US" sz="1400" dirty="0"/>
           </a:p>
@@ -14452,7 +14745,7 @@
         <p:spPr>
           <a:xfrm>
             <a:off x="0" y="658368"/>
-            <a:ext cx="5120640" cy="5833872"/>
+            <a:ext cx="2468880" cy="5833872"/>
           </a:xfrm>
           <a:prstGeom prst="rect">
             <a:avLst/>
@@ -14467,8 +14760,8 @@
         </p:nvSpPr>
         <p:spPr>
           <a:xfrm>
-            <a:off x="5349240" y="1005840"/>
-            <a:ext cx="6522415" cy="731520"/>
+            <a:off x="2697480" y="1005840"/>
+            <a:ext cx="9174175" cy="731520"/>
           </a:xfrm>
           <a:prstGeom prst="rect">
             <a:avLst/>
@@ -14494,7 +14787,7 @@
                 <a:ea typeface="Times New Roman" pitchFamily="34" charset="-122"/>
                 <a:cs typeface="Times New Roman" pitchFamily="34" charset="-120"/>
               </a:rPr>
-              <a:t>Evaluation 1</a:t>
+              <a:t>3. Importance and Problems</a:t>
             </a:r>
             <a:endParaRPr lang="en-US" sz="3600" dirty="0"/>
           </a:p>
@@ -14508,8 +14801,47 @@
         </p:nvSpPr>
         <p:spPr>
           <a:xfrm>
-            <a:off x="5349240" y="1783080"/>
-            <a:ext cx="6522415" cy="4663440"/>
+            <a:off x="2697480" y="1737360"/>
+            <a:ext cx="9174175" cy="457200"/>
+          </a:xfrm>
+          <a:prstGeom prst="rect">
+            <a:avLst/>
+          </a:prstGeom>
+          <a:noFill/>
+          <a:ln/>
+        </p:spPr>
+        <p:txBody>
+          <a:bodyPr wrap="square" lIns="0" tIns="0" rIns="0" bIns="0" rtlCol="0" anchor="ctr"/>
+          <a:lstStyle/>
+          <a:p>
+            <a:pPr algn="l" indent="0" marL="0">
+              <a:buNone/>
+            </a:pPr>
+            <a:r>
+              <a:rPr lang="en-US" sz="3200" b="1" dirty="0">
+                <a:solidFill>
+                  <a:srgbClr val="990011"/>
+                </a:solidFill>
+                <a:latin typeface="Times New Roman" pitchFamily="34" charset="0"/>
+                <a:ea typeface="Times New Roman" pitchFamily="34" charset="-122"/>
+                <a:cs typeface="Times New Roman" pitchFamily="34" charset="-120"/>
+              </a:rPr>
+              <a:t>B) Problems</a:t>
+            </a:r>
+            <a:endParaRPr lang="en-US" sz="3200" dirty="0"/>
+          </a:p>
+        </p:txBody>
+      </p:sp>
+      <p:sp>
+        <p:nvSpPr>
+          <p:cNvPr id="6" name="Text 3"/>
+          <p:cNvSpPr/>
+          <p:nvPr/>
+        </p:nvSpPr>
+        <p:spPr>
+          <a:xfrm>
+            <a:off x="2697480" y="2240280"/>
+            <a:ext cx="9174175" cy="4206240"/>
           </a:xfrm>
           <a:prstGeom prst="rect">
             <a:avLst/>
@@ -14528,7 +14860,7 @@
               <a:buNone/>
             </a:pPr>
             <a:r>
-              <a:rPr lang="en-US" sz="4000" dirty="0">
+              <a:rPr lang="en-US" sz="4000" i="1" dirty="0">
                 <a:solidFill>
                   <a:srgbClr val="111111"/>
                 </a:solidFill>
@@ -14536,7 +14868,118 @@
                 <a:ea typeface="Times New Roman" pitchFamily="34" charset="-122"/>
                 <a:cs typeface="Times New Roman" pitchFamily="34" charset="-120"/>
               </a:rPr>
-              <a:t>Distinguish nomadism and ranching.</a:t>
+              <a:t>Pastoral farming faces the following problems:</a:t>
+            </a:r>
+            <a:endParaRPr lang="en-US" sz="4000" dirty="0"/>
+          </a:p>
+          <a:p>
+            <a:pPr algn="l" indent="0" marL="0">
+              <a:spcAft>
+                <a:spcPts val="800"/>
+              </a:spcAft>
+              <a:buNone/>
+            </a:pPr>
+            <a:r>
+              <a:rPr lang="en-US" sz="4000" b="1" dirty="0">
+                <a:solidFill>
+                  <a:srgbClr val="111111"/>
+                </a:solidFill>
+                <a:latin typeface="Times New Roman" pitchFamily="34" charset="0"/>
+                <a:ea typeface="Times New Roman" pitchFamily="34" charset="-122"/>
+                <a:cs typeface="Times New Roman" pitchFamily="34" charset="-120"/>
+              </a:rPr>
+              <a:t>Drought: </a:t>
+            </a:r>
+            <a:pPr algn="l" indent="0" marL="0">
+              <a:spcAft>
+                <a:spcPts val="800"/>
+              </a:spcAft>
+              <a:buNone/>
+            </a:pPr>
+            <a:r>
+              <a:rPr lang="en-US" sz="4000" dirty="0">
+                <a:solidFill>
+                  <a:srgbClr val="111111"/>
+                </a:solidFill>
+                <a:latin typeface="Times New Roman" pitchFamily="34" charset="0"/>
+                <a:ea typeface="Times New Roman" pitchFamily="34" charset="-122"/>
+                <a:cs typeface="Times New Roman" pitchFamily="34" charset="-120"/>
+              </a:rPr>
+              <a:t>Grass and water become scarce.</a:t>
+            </a:r>
+            <a:endParaRPr lang="en-US" sz="4000" dirty="0"/>
+          </a:p>
+          <a:p>
+            <a:pPr algn="l" indent="0" marL="0">
+              <a:spcAft>
+                <a:spcPts val="800"/>
+              </a:spcAft>
+              <a:buNone/>
+            </a:pPr>
+            <a:r>
+              <a:rPr lang="en-US" sz="4000" b="1" dirty="0">
+                <a:solidFill>
+                  <a:srgbClr val="111111"/>
+                </a:solidFill>
+                <a:latin typeface="Times New Roman" pitchFamily="34" charset="0"/>
+                <a:ea typeface="Times New Roman" pitchFamily="34" charset="-122"/>
+                <a:cs typeface="Times New Roman" pitchFamily="34" charset="-120"/>
+              </a:rPr>
+              <a:t>Animal diseases: </a:t>
+            </a:r>
+            <a:pPr algn="l" indent="0" marL="0">
+              <a:spcAft>
+                <a:spcPts val="800"/>
+              </a:spcAft>
+              <a:buNone/>
+            </a:pPr>
+            <a:r>
+              <a:rPr lang="en-US" sz="4000" dirty="0">
+                <a:solidFill>
+                  <a:srgbClr val="111111"/>
+                </a:solidFill>
+                <a:latin typeface="Times New Roman" pitchFamily="34" charset="0"/>
+                <a:ea typeface="Times New Roman" pitchFamily="34" charset="-122"/>
+                <a:cs typeface="Times New Roman" pitchFamily="34" charset="-120"/>
+              </a:rPr>
+              <a:t>Diseases kill many animals.</a:t>
+            </a:r>
+            <a:endParaRPr lang="en-US" sz="4000" dirty="0"/>
+          </a:p>
+          <a:p>
+            <a:pPr algn="l" indent="0" marL="0">
+              <a:spcAft>
+                <a:spcPts val="800"/>
+              </a:spcAft>
+              <a:buNone/>
+            </a:pPr>
+            <a:r>
+              <a:rPr lang="en-US" sz="4000" b="1" dirty="0">
+                <a:solidFill>
+                  <a:srgbClr val="111111"/>
+                </a:solidFill>
+                <a:latin typeface="Times New Roman" pitchFamily="34" charset="0"/>
+                <a:ea typeface="Times New Roman" pitchFamily="34" charset="-122"/>
+                <a:cs typeface="Times New Roman" pitchFamily="34" charset="-120"/>
+              </a:rPr>
+              <a:t>Cattle theft: </a:t>
+            </a:r>
+            <a:pPr algn="l" indent="0" marL="0">
+              <a:spcAft>
+                <a:spcPts val="800"/>
+              </a:spcAft>
+              <a:buNone/>
+            </a:pPr>
+            <a:r>
+              <a:rPr lang="en-US" sz="4000" dirty="0">
+                <a:solidFill>
+                  <a:srgbClr val="111111"/>
+                </a:solidFill>
+                <a:latin typeface="Times New Roman" pitchFamily="34" charset="0"/>
+                <a:ea typeface="Times New Roman" pitchFamily="34" charset="-122"/>
+                <a:cs typeface="Times New Roman" pitchFamily="34" charset="-120"/>
+              </a:rPr>
+              <a:t>Thieves steal herds.</a:t>
             </a:r>
             <a:endParaRPr lang="en-US" sz="4000" dirty="0"/>
           </a:p>
@@ -14887,7 +15330,7 @@
                 <a:ea typeface="Calibri" pitchFamily="34" charset="-122"/>
                 <a:cs typeface="Calibri" pitchFamily="34" charset="-120"/>
               </a:rPr>
-              <a:t>FORMATIVE EVALUATION</a:t>
+              <a:t>BOARD SUMMARY</a:t>
             </a:r>
             <a:endParaRPr lang="en-US" sz="1400" dirty="0"/>
           </a:p>
@@ -14952,7 +15395,7 @@
                 <a:ea typeface="Times New Roman" pitchFamily="34" charset="-122"/>
                 <a:cs typeface="Times New Roman" pitchFamily="34" charset="-120"/>
               </a:rPr>
-              <a:t>Expected Answer</a:t>
+              <a:t>3. Importance and Problems</a:t>
             </a:r>
             <a:endParaRPr lang="en-US" sz="3600" dirty="0"/>
           </a:p>
@@ -14966,8 +15409,47 @@
         </p:nvSpPr>
         <p:spPr>
           <a:xfrm>
-            <a:off x="5349240" y="1783080"/>
-            <a:ext cx="6522415" cy="4663440"/>
+            <a:off x="5349240" y="1737360"/>
+            <a:ext cx="6522415" cy="457200"/>
+          </a:xfrm>
+          <a:prstGeom prst="rect">
+            <a:avLst/>
+          </a:prstGeom>
+          <a:noFill/>
+          <a:ln/>
+        </p:spPr>
+        <p:txBody>
+          <a:bodyPr wrap="square" lIns="0" tIns="0" rIns="0" bIns="0" rtlCol="0" anchor="ctr"/>
+          <a:lstStyle/>
+          <a:p>
+            <a:pPr algn="l" indent="0" marL="0">
+              <a:buNone/>
+            </a:pPr>
+            <a:r>
+              <a:rPr lang="en-US" sz="3200" b="1" dirty="0">
+                <a:solidFill>
+                  <a:srgbClr val="990011"/>
+                </a:solidFill>
+                <a:latin typeface="Times New Roman" pitchFamily="34" charset="0"/>
+                <a:ea typeface="Times New Roman" pitchFamily="34" charset="-122"/>
+                <a:cs typeface="Times New Roman" pitchFamily="34" charset="-120"/>
+              </a:rPr>
+              <a:t>B) Problems (continued)</a:t>
+            </a:r>
+            <a:endParaRPr lang="en-US" sz="3200" dirty="0"/>
+          </a:p>
+        </p:txBody>
+      </p:sp>
+      <p:sp>
+        <p:nvSpPr>
+          <p:cNvPr id="6" name="Text 3"/>
+          <p:cNvSpPr/>
+          <p:nvPr/>
+        </p:nvSpPr>
+        <p:spPr>
+          <a:xfrm>
+            <a:off x="5349240" y="2240280"/>
+            <a:ext cx="6522415" cy="4206240"/>
           </a:xfrm>
           <a:prstGeom prst="rect">
             <a:avLst/>
@@ -14986,7 +15468,7 @@
               <a:buNone/>
             </a:pPr>
             <a:r>
-              <a:rPr lang="en-US" sz="4000" dirty="0">
+              <a:rPr lang="en-US" sz="4000" b="1" dirty="0">
                 <a:solidFill>
                   <a:srgbClr val="111111"/>
                 </a:solidFill>
@@ -14994,7 +15476,24 @@
                 <a:ea typeface="Times New Roman" pitchFamily="34" charset="-122"/>
                 <a:cs typeface="Times New Roman" pitchFamily="34" charset="-120"/>
               </a:rPr>
-              <a:t>Nomadism moves with herds; ranching keeps them on fenced farms.</a:t>
+              <a:t>Farmer–herder conflicts: </a:t>
+            </a:r>
+            <a:pPr algn="l" indent="0" marL="0">
+              <a:spcAft>
+                <a:spcPts val="800"/>
+              </a:spcAft>
+              <a:buNone/>
+            </a:pPr>
+            <a:r>
+              <a:rPr lang="en-US" sz="4000" dirty="0">
+                <a:solidFill>
+                  <a:srgbClr val="111111"/>
+                </a:solidFill>
+                <a:latin typeface="Times New Roman" pitchFamily="34" charset="0"/>
+                <a:ea typeface="Times New Roman" pitchFamily="34" charset="-122"/>
+                <a:cs typeface="Times New Roman" pitchFamily="34" charset="-120"/>
+              </a:rPr>
+              <a:t>Animals destroy crops, and fights break out.</a:t>
             </a:r>
             <a:endParaRPr lang="en-US" sz="4000" dirty="0"/>
           </a:p>
@@ -15171,7 +15670,7 @@
                 <a:ea typeface="Times New Roman" pitchFamily="34" charset="-122"/>
                 <a:cs typeface="Times New Roman" pitchFamily="34" charset="-120"/>
               </a:rPr>
-              <a:t>Evaluation 2</a:t>
+              <a:t>Evaluation 1</a:t>
             </a:r>
             <a:endParaRPr lang="en-US" sz="3600" dirty="0"/>
           </a:p>
@@ -15213,7 +15712,7 @@
                 <a:ea typeface="Times New Roman" pitchFamily="34" charset="-122"/>
                 <a:cs typeface="Times New Roman" pitchFamily="34" charset="-120"/>
               </a:rPr>
-              <a:t>Give two problems of pastoral farming.</a:t>
+              <a:t>Distinguish nomadism and ranching.</a:t>
             </a:r>
             <a:endParaRPr lang="en-US" sz="4000" dirty="0"/>
           </a:p>
@@ -15432,7 +15931,7 @@
                 <a:ea typeface="Times New Roman" pitchFamily="34" charset="-122"/>
                 <a:cs typeface="Times New Roman" pitchFamily="34" charset="-120"/>
               </a:rPr>
-              <a:t>Diseases and farmer–herder conflicts.</a:t>
+              <a:t>Nomadism moves with herds; ranching keeps them on fenced farms.</a:t>
             </a:r>
             <a:endParaRPr lang="en-US" sz="4000" dirty="0"/>
           </a:p>
@@ -15544,7 +16043,7 @@
                 <a:ea typeface="Calibri" pitchFamily="34" charset="-122"/>
                 <a:cs typeface="Calibri" pitchFamily="34" charset="-120"/>
               </a:rPr>
-              <a:t>REMEDIATION</a:t>
+              <a:t>FORMATIVE EVALUATION</a:t>
             </a:r>
             <a:endParaRPr lang="en-US" sz="1400" dirty="0"/>
           </a:p>
@@ -15567,7 +16066,7 @@
         <p:spPr>
           <a:xfrm>
             <a:off x="0" y="658368"/>
-            <a:ext cx="2468880" cy="5833872"/>
+            <a:ext cx="5120640" cy="5833872"/>
           </a:xfrm>
           <a:prstGeom prst="rect">
             <a:avLst/>
@@ -15582,8 +16081,8 @@
         </p:nvSpPr>
         <p:spPr>
           <a:xfrm>
-            <a:off x="2697480" y="1005840"/>
-            <a:ext cx="9174175" cy="731520"/>
+            <a:off x="5349240" y="1005840"/>
+            <a:ext cx="6522415" cy="731520"/>
           </a:xfrm>
           <a:prstGeom prst="rect">
             <a:avLst/>
@@ -15609,7 +16108,7 @@
                 <a:ea typeface="Times New Roman" pitchFamily="34" charset="-122"/>
                 <a:cs typeface="Times New Roman" pitchFamily="34" charset="-120"/>
               </a:rPr>
-              <a:t>Remediation</a:t>
+              <a:t>Evaluation 2</a:t>
             </a:r>
             <a:endParaRPr lang="en-US" sz="3600" dirty="0"/>
           </a:p>
@@ -15623,8 +16122,8 @@
         </p:nvSpPr>
         <p:spPr>
           <a:xfrm>
-            <a:off x="2697480" y="1783080"/>
-            <a:ext cx="9174175" cy="4663440"/>
+            <a:off x="5349240" y="1783080"/>
+            <a:ext cx="6522415" cy="4663440"/>
           </a:xfrm>
           <a:prstGeom prst="rect">
             <a:avLst/>
@@ -15643,7 +16142,7 @@
               <a:buNone/>
             </a:pPr>
             <a:r>
-              <a:rPr lang="en-US" sz="4000" b="1" dirty="0">
+              <a:rPr lang="en-US" sz="4000" dirty="0">
                 <a:solidFill>
                   <a:srgbClr val="111111"/>
                 </a:solidFill>
@@ -15651,73 +16150,7 @@
                 <a:ea typeface="Times New Roman" pitchFamily="34" charset="-122"/>
                 <a:cs typeface="Times New Roman" pitchFamily="34" charset="-120"/>
               </a:rPr>
-              <a:t>Fill in the blanks:</a:t>
-            </a:r>
-            <a:endParaRPr lang="en-US" sz="4000" dirty="0"/>
-          </a:p>
-          <a:p>
-            <a:pPr algn="l" marL="342900" indent="-342900">
-              <a:spcAft>
-                <a:spcPts val="800"/>
-              </a:spcAft>
-              <a:buSzPct val="100000"/>
-              <a:buFont typeface="+mj-lt"/>
-              <a:buAutoNum type="arabicPeriod" startAt="1"/>
-            </a:pPr>
-            <a:r>
-              <a:rPr lang="en-US" sz="4000" dirty="0">
-                <a:solidFill>
-                  <a:srgbClr val="111111"/>
-                </a:solidFill>
-                <a:latin typeface="Times New Roman" pitchFamily="34" charset="0"/>
-                <a:ea typeface="Times New Roman" pitchFamily="34" charset="-122"/>
-                <a:cs typeface="Times New Roman" pitchFamily="34" charset="-120"/>
-              </a:rPr>
-              <a:t>Seasonal movement of herds is ______.</a:t>
-            </a:r>
-            <a:endParaRPr lang="en-US" sz="4000" dirty="0"/>
-          </a:p>
-          <a:p>
-            <a:pPr algn="l" marL="342900" indent="-342900">
-              <a:spcAft>
-                <a:spcPts val="800"/>
-              </a:spcAft>
-              <a:buSzPct val="100000"/>
-              <a:buFont typeface="+mj-lt"/>
-              <a:buAutoNum type="arabicPeriod" startAt="1"/>
-            </a:pPr>
-            <a:r>
-              <a:rPr lang="en-US" sz="4000" dirty="0">
-                <a:solidFill>
-                  <a:srgbClr val="111111"/>
-                </a:solidFill>
-                <a:latin typeface="Times New Roman" pitchFamily="34" charset="0"/>
-                <a:ea typeface="Times New Roman" pitchFamily="34" charset="-122"/>
-                <a:cs typeface="Times New Roman" pitchFamily="34" charset="-120"/>
-              </a:rPr>
-              <a:t>A large fenced farm for animals is a ______.</a:t>
-            </a:r>
-            <a:endParaRPr lang="en-US" sz="4000" dirty="0"/>
-          </a:p>
-          <a:p>
-            <a:pPr algn="l" marL="342900" indent="-342900">
-              <a:spcAft>
-                <a:spcPts val="800"/>
-              </a:spcAft>
-              <a:buSzPct val="100000"/>
-              <a:buFont typeface="+mj-lt"/>
-              <a:buAutoNum type="arabicPeriod" startAt="1"/>
-            </a:pPr>
-            <a:r>
-              <a:rPr lang="en-US" sz="4000" dirty="0">
-                <a:solidFill>
-                  <a:srgbClr val="111111"/>
-                </a:solidFill>
-                <a:latin typeface="Times New Roman" pitchFamily="34" charset="0"/>
-                <a:ea typeface="Times New Roman" pitchFamily="34" charset="-122"/>
-                <a:cs typeface="Times New Roman" pitchFamily="34" charset="-120"/>
-              </a:rPr>
-              <a:t>Ranches are found on the ______ Plateau.</a:t>
+              <a:t>Give two problems of pastoral farming.</a:t>
             </a:r>
             <a:endParaRPr lang="en-US" sz="4000" dirty="0"/>
           </a:p>
@@ -15829,7 +16262,7 @@
                 <a:ea typeface="Calibri" pitchFamily="34" charset="-122"/>
                 <a:cs typeface="Calibri" pitchFamily="34" charset="-120"/>
               </a:rPr>
-              <a:t>HOMEWORK</a:t>
+              <a:t>FORMATIVE EVALUATION</a:t>
             </a:r>
             <a:endParaRPr lang="en-US" sz="1400" dirty="0"/>
           </a:p>
@@ -15894,7 +16327,7 @@
                 <a:ea typeface="Times New Roman" pitchFamily="34" charset="-122"/>
                 <a:cs typeface="Times New Roman" pitchFamily="34" charset="-120"/>
               </a:rPr>
-              <a:t>Homework</a:t>
+              <a:t>Expected Answer</a:t>
             </a:r>
             <a:endParaRPr lang="en-US" sz="3600" dirty="0"/>
           </a:p>
@@ -15936,7 +16369,7 @@
                 <a:ea typeface="Times New Roman" pitchFamily="34" charset="-122"/>
                 <a:cs typeface="Times New Roman" pitchFamily="34" charset="-120"/>
               </a:rPr>
-              <a:t>Propose two solutions to farmer–herder conflicts in the North.</a:t>
+              <a:t>Diseases and farmer–herder conflicts.</a:t>
             </a:r>
             <a:endParaRPr lang="en-US" sz="4000" dirty="0"/>
           </a:p>
@@ -16048,7 +16481,7 @@
                 <a:ea typeface="Calibri" pitchFamily="34" charset="-122"/>
                 <a:cs typeface="Calibri" pitchFamily="34" charset="-120"/>
               </a:rPr>
-              <a:t>NEXT LESSON</a:t>
+              <a:t>REMEDIATION</a:t>
             </a:r>
             <a:endParaRPr lang="en-US" sz="1400" dirty="0"/>
           </a:p>
@@ -16071,7 +16504,7 @@
         <p:spPr>
           <a:xfrm>
             <a:off x="0" y="658368"/>
-            <a:ext cx="5120640" cy="5833872"/>
+            <a:ext cx="2468880" cy="5833872"/>
           </a:xfrm>
           <a:prstGeom prst="rect">
             <a:avLst/>
@@ -16086,8 +16519,8 @@
         </p:nvSpPr>
         <p:spPr>
           <a:xfrm>
-            <a:off x="5349240" y="1005840"/>
-            <a:ext cx="6522415" cy="731520"/>
+            <a:off x="2697480" y="1005840"/>
+            <a:ext cx="9174175" cy="731520"/>
           </a:xfrm>
           <a:prstGeom prst="rect">
             <a:avLst/>
@@ -16113,7 +16546,7 @@
                 <a:ea typeface="Times New Roman" pitchFamily="34" charset="-122"/>
                 <a:cs typeface="Times New Roman" pitchFamily="34" charset="-120"/>
               </a:rPr>
-              <a:t>Next Lesson</a:t>
+              <a:t>Remediation</a:t>
             </a:r>
             <a:endParaRPr lang="en-US" sz="3600" dirty="0"/>
           </a:p>
@@ -16127,8 +16560,8 @@
         </p:nvSpPr>
         <p:spPr>
           <a:xfrm>
-            <a:off x="5349240" y="1783080"/>
-            <a:ext cx="6522415" cy="4663440"/>
+            <a:off x="2697480" y="1783080"/>
+            <a:ext cx="9174175" cy="4663440"/>
           </a:xfrm>
           <a:prstGeom prst="rect">
             <a:avLst/>
@@ -16137,10 +16570,10 @@
           <a:ln/>
         </p:spPr>
         <p:txBody>
-          <a:bodyPr wrap="square" lIns="0" tIns="0" rIns="0" bIns="0" rtlCol="0" anchor="ctr"/>
-          <a:lstStyle/>
-          <a:p>
-            <a:pPr algn="ctr" indent="0" marL="0">
+          <a:bodyPr wrap="square" lIns="0" tIns="0" rIns="0" bIns="0" rtlCol="0" anchor="t"/>
+          <a:lstStyle/>
+          <a:p>
+            <a:pPr algn="l" indent="0" marL="0">
               <a:spcAft>
                 <a:spcPts val="800"/>
               </a:spcAft>
@@ -16155,27 +16588,73 @@
                 <a:ea typeface="Times New Roman" pitchFamily="34" charset="-122"/>
                 <a:cs typeface="Times New Roman" pitchFamily="34" charset="-120"/>
               </a:rPr>
-              <a:t>Our next lesson will be on:</a:t>
+              <a:t>Fill in the blanks:</a:t>
             </a:r>
             <a:endParaRPr lang="en-US" sz="4000" dirty="0"/>
           </a:p>
           <a:p>
-            <a:pPr algn="ctr" indent="0" marL="0">
+            <a:pPr algn="l" marL="342900" indent="-342900">
               <a:spcAft>
                 <a:spcPts val="800"/>
               </a:spcAft>
-              <a:buNone/>
+              <a:buSzPct val="100000"/>
+              <a:buFont typeface="+mj-lt"/>
+              <a:buAutoNum type="arabicPeriod" startAt="1"/>
             </a:pPr>
             <a:r>
-              <a:rPr lang="en-US" sz="4000" b="1" dirty="0">
-                <a:solidFill>
-                  <a:srgbClr val="990011"/>
+              <a:rPr lang="en-US" sz="4000" dirty="0">
+                <a:solidFill>
+                  <a:srgbClr val="111111"/>
                 </a:solidFill>
                 <a:latin typeface="Times New Roman" pitchFamily="34" charset="0"/>
                 <a:ea typeface="Times New Roman" pitchFamily="34" charset="-122"/>
                 <a:cs typeface="Times New Roman" pitchFamily="34" charset="-120"/>
               </a:rPr>
-              <a:t>Lesson 36: The Impact of Agriculture on the Economy of Cameroon</a:t>
+              <a:t>Seasonal movement of herds is ______.</a:t>
+            </a:r>
+            <a:endParaRPr lang="en-US" sz="4000" dirty="0"/>
+          </a:p>
+          <a:p>
+            <a:pPr algn="l" marL="342900" indent="-342900">
+              <a:spcAft>
+                <a:spcPts val="800"/>
+              </a:spcAft>
+              <a:buSzPct val="100000"/>
+              <a:buFont typeface="+mj-lt"/>
+              <a:buAutoNum type="arabicPeriod" startAt="1"/>
+            </a:pPr>
+            <a:r>
+              <a:rPr lang="en-US" sz="4000" dirty="0">
+                <a:solidFill>
+                  <a:srgbClr val="111111"/>
+                </a:solidFill>
+                <a:latin typeface="Times New Roman" pitchFamily="34" charset="0"/>
+                <a:ea typeface="Times New Roman" pitchFamily="34" charset="-122"/>
+                <a:cs typeface="Times New Roman" pitchFamily="34" charset="-120"/>
+              </a:rPr>
+              <a:t>A large fenced farm for animals is a ______.</a:t>
+            </a:r>
+            <a:endParaRPr lang="en-US" sz="4000" dirty="0"/>
+          </a:p>
+          <a:p>
+            <a:pPr algn="l" marL="342900" indent="-342900">
+              <a:spcAft>
+                <a:spcPts val="800"/>
+              </a:spcAft>
+              <a:buSzPct val="100000"/>
+              <a:buFont typeface="+mj-lt"/>
+              <a:buAutoNum type="arabicPeriod" startAt="1"/>
+            </a:pPr>
+            <a:r>
+              <a:rPr lang="en-US" sz="4000" dirty="0">
+                <a:solidFill>
+                  <a:srgbClr val="111111"/>
+                </a:solidFill>
+                <a:latin typeface="Times New Roman" pitchFamily="34" charset="0"/>
+                <a:ea typeface="Times New Roman" pitchFamily="34" charset="-122"/>
+                <a:cs typeface="Times New Roman" pitchFamily="34" charset="-120"/>
+              </a:rPr>
+              <a:t>Ranches are found on the ______ Plateau.</a:t>
             </a:r>
             <a:endParaRPr lang="en-US" sz="4000" dirty="0"/>
           </a:p>
@@ -16287,6 +16766,464 @@
                 <a:ea typeface="Calibri" pitchFamily="34" charset="-122"/>
                 <a:cs typeface="Calibri" pitchFamily="34" charset="-120"/>
               </a:rPr>
+              <a:t>HOMEWORK</a:t>
+            </a:r>
+            <a:endParaRPr lang="en-US" sz="1400" dirty="0"/>
+          </a:p>
+        </p:txBody>
+      </p:sp>
+      <p:pic>
+        <p:nvPicPr>
+          <p:cNvPr id="3" name="Image 0" descr="/home/claude/f4/img/minesec_sheet.png">    </p:cNvPr>
+          <p:cNvPicPr>
+            <a:picLocks noChangeAspect="1"/>
+          </p:cNvPicPr>
+          <p:nvPr/>
+        </p:nvPicPr>
+        <p:blipFill>
+          <a:blip r:embed="rId1"/>
+          <a:stretch>
+            <a:fillRect/>
+          </a:stretch>
+        </p:blipFill>
+        <p:spPr>
+          <a:xfrm>
+            <a:off x="0" y="658368"/>
+            <a:ext cx="5120640" cy="5833872"/>
+          </a:xfrm>
+          <a:prstGeom prst="rect">
+            <a:avLst/>
+          </a:prstGeom>
+        </p:spPr>
+      </p:pic>
+      <p:sp>
+        <p:nvSpPr>
+          <p:cNvPr id="4" name="Text 1"/>
+          <p:cNvSpPr/>
+          <p:nvPr/>
+        </p:nvSpPr>
+        <p:spPr>
+          <a:xfrm>
+            <a:off x="5349240" y="1005840"/>
+            <a:ext cx="6522415" cy="731520"/>
+          </a:xfrm>
+          <a:prstGeom prst="rect">
+            <a:avLst/>
+          </a:prstGeom>
+          <a:noFill/>
+          <a:ln/>
+        </p:spPr>
+        <p:txBody>
+          <a:bodyPr wrap="square" lIns="0" tIns="0" rIns="0" bIns="0" rtlCol="0" anchor="ctr">
+            <a:normAutofit/>
+          </a:bodyPr>
+          <a:lstStyle/>
+          <a:p>
+            <a:pPr algn="ctr" indent="0" marL="0">
+              <a:buNone/>
+            </a:pPr>
+            <a:r>
+              <a:rPr lang="en-US" sz="3600" b="1" dirty="0">
+                <a:solidFill>
+                  <a:srgbClr val="990011"/>
+                </a:solidFill>
+                <a:latin typeface="Times New Roman" pitchFamily="34" charset="0"/>
+                <a:ea typeface="Times New Roman" pitchFamily="34" charset="-122"/>
+                <a:cs typeface="Times New Roman" pitchFamily="34" charset="-120"/>
+              </a:rPr>
+              <a:t>Homework</a:t>
+            </a:r>
+            <a:endParaRPr lang="en-US" sz="3600" dirty="0"/>
+          </a:p>
+        </p:txBody>
+      </p:sp>
+      <p:sp>
+        <p:nvSpPr>
+          <p:cNvPr id="5" name="Text 2"/>
+          <p:cNvSpPr/>
+          <p:nvPr/>
+        </p:nvSpPr>
+        <p:spPr>
+          <a:xfrm>
+            <a:off x="5349240" y="1783080"/>
+            <a:ext cx="6522415" cy="4663440"/>
+          </a:xfrm>
+          <a:prstGeom prst="rect">
+            <a:avLst/>
+          </a:prstGeom>
+          <a:noFill/>
+          <a:ln/>
+        </p:spPr>
+        <p:txBody>
+          <a:bodyPr wrap="square" lIns="0" tIns="0" rIns="0" bIns="0" rtlCol="0" anchor="t"/>
+          <a:lstStyle/>
+          <a:p>
+            <a:pPr algn="l" indent="0" marL="0">
+              <a:spcAft>
+                <a:spcPts val="800"/>
+              </a:spcAft>
+              <a:buNone/>
+            </a:pPr>
+            <a:r>
+              <a:rPr lang="en-US" sz="4000" dirty="0">
+                <a:solidFill>
+                  <a:srgbClr val="111111"/>
+                </a:solidFill>
+                <a:latin typeface="Times New Roman" pitchFamily="34" charset="0"/>
+                <a:ea typeface="Times New Roman" pitchFamily="34" charset="-122"/>
+                <a:cs typeface="Times New Roman" pitchFamily="34" charset="-120"/>
+              </a:rPr>
+              <a:t>Propose two solutions to farmer–herder conflicts in the North.</a:t>
+            </a:r>
+            <a:endParaRPr lang="en-US" sz="4000" dirty="0"/>
+          </a:p>
+        </p:txBody>
+      </p:sp>
+      <p:sp>
+        <p:nvSpPr>
+          <p:cNvPr id="25" name="Slide Number Placeholder 0"/>
+          <p:cNvSpPr>
+            <a:spLocks noGrp="1"/>
+          </p:cNvSpPr>
+          <p:nvPr>
+            <p:ph type="sldNum" sz="quarter" idx="4294967295"/>
+          </p:nvPr>
+        </p:nvSpPr>
+        <p:spPr>
+          <a:xfrm>
+            <a:off x="27432" y="91440"/>
+            <a:ext cx="585216" cy="475488"/>
+          </a:xfrm>
+          <a:prstGeom prst="rect">
+            <a:avLst/>
+          </a:prstGeom>
+          <a:extLst>
+            <a:ext uri="{C572A759-6A51-4108-AA02-DFA0A04FC94B}">
+              <ma14:wrappingTextBoxFlag xmlns:ma14="http://schemas.microsoft.com/office/mac/drawingml/2011/main" val="0"/>
+            </a:ext>
+          </a:extLst>
+        </p:spPr>
+        <p:txBody>
+          <a:bodyPr/>
+          <a:lstStyle>
+            <a:lvl1pPr>
+              <a:defRPr sz="2000">
+                <a:solidFill>
+                  <a:srgbClr val="FFFFFF"/>
+                </a:solidFill>
+                <a:latin typeface="Calibri"/>
+                <a:ea typeface="Calibri"/>
+                <a:cs typeface="Calibri"/>
+              </a:defRPr>
+            </a:lvl1pPr>
+          </a:lstStyle>
+          <a:p>
+            <a:pPr algn="ctr"/>
+            <a:fld id="{F7021451-1387-4CA6-816F-3879F97B5CBC}" type="slidenum">
+              <a:rPr b="1" lang="en-US"/>
+              <a:t>46</a:t>
+            </a:fld>
+            <a:endParaRPr lang="en-US"/>
+          </a:p>
+        </p:txBody>
+      </p:sp>
+    </p:spTree>
+  </p:cSld>
+  <p:clrMapOvr>
+    <a:masterClrMapping/>
+  </p:clrMapOvr>
+</p:sld>
+</file>
+
+<file path=ppt/slides/slide47.xml><?xml version="1.0" encoding="utf-8"?>
+<p:sld xmlns:a="http://schemas.openxmlformats.org/drawingml/2006/main" xmlns:r="http://schemas.openxmlformats.org/officeDocument/2006/relationships" xmlns:p="http://schemas.openxmlformats.org/presentationml/2006/main">
+  <p:cSld name="Slide 47">
+    <p:spTree>
+      <p:nvGrpSpPr>
+        <p:cNvPr id="1" name=""/>
+        <p:cNvGrpSpPr/>
+        <p:nvPr/>
+      </p:nvGrpSpPr>
+      <p:grpSpPr>
+        <a:xfrm>
+          <a:off x="0" y="0"/>
+          <a:ext cx="0" cy="0"/>
+          <a:chOff x="0" y="0"/>
+          <a:chExt cx="0" cy="0"/>
+        </a:xfrm>
+      </p:grpSpPr>
+      <p:sp>
+        <p:nvSpPr>
+          <p:cNvPr id="2" name="Text 0"/>
+          <p:cNvSpPr/>
+          <p:nvPr/>
+        </p:nvSpPr>
+        <p:spPr>
+          <a:xfrm>
+            <a:off x="457200" y="713232"/>
+            <a:ext cx="11368735" cy="274320"/>
+          </a:xfrm>
+          <a:prstGeom prst="rect">
+            <a:avLst/>
+          </a:prstGeom>
+          <a:noFill/>
+          <a:ln/>
+        </p:spPr>
+        <p:txBody>
+          <a:bodyPr wrap="square" lIns="0" tIns="0" rIns="0" bIns="0" rtlCol="0" anchor="ctr"/>
+          <a:lstStyle/>
+          <a:p>
+            <a:pPr algn="r" indent="0" marL="0">
+              <a:buNone/>
+            </a:pPr>
+            <a:r>
+              <a:rPr lang="en-US" sz="1400" b="1" dirty="0">
+                <a:solidFill>
+                  <a:srgbClr val="1C3F6E"/>
+                </a:solidFill>
+                <a:latin typeface="Calibri" pitchFamily="34" charset="0"/>
+                <a:ea typeface="Calibri" pitchFamily="34" charset="-122"/>
+                <a:cs typeface="Calibri" pitchFamily="34" charset="-120"/>
+              </a:rPr>
+              <a:t>NEXT LESSON</a:t>
+            </a:r>
+            <a:endParaRPr lang="en-US" sz="1400" dirty="0"/>
+          </a:p>
+        </p:txBody>
+      </p:sp>
+      <p:pic>
+        <p:nvPicPr>
+          <p:cNvPr id="3" name="Image 0" descr="/home/claude/f4/img/minesec_sheet.png">    </p:cNvPr>
+          <p:cNvPicPr>
+            <a:picLocks noChangeAspect="1"/>
+          </p:cNvPicPr>
+          <p:nvPr/>
+        </p:nvPicPr>
+        <p:blipFill>
+          <a:blip r:embed="rId1"/>
+          <a:stretch>
+            <a:fillRect/>
+          </a:stretch>
+        </p:blipFill>
+        <p:spPr>
+          <a:xfrm>
+            <a:off x="0" y="658368"/>
+            <a:ext cx="5120640" cy="5833872"/>
+          </a:xfrm>
+          <a:prstGeom prst="rect">
+            <a:avLst/>
+          </a:prstGeom>
+        </p:spPr>
+      </p:pic>
+      <p:sp>
+        <p:nvSpPr>
+          <p:cNvPr id="4" name="Text 1"/>
+          <p:cNvSpPr/>
+          <p:nvPr/>
+        </p:nvSpPr>
+        <p:spPr>
+          <a:xfrm>
+            <a:off x="5349240" y="1005840"/>
+            <a:ext cx="6522415" cy="731520"/>
+          </a:xfrm>
+          <a:prstGeom prst="rect">
+            <a:avLst/>
+          </a:prstGeom>
+          <a:noFill/>
+          <a:ln/>
+        </p:spPr>
+        <p:txBody>
+          <a:bodyPr wrap="square" lIns="0" tIns="0" rIns="0" bIns="0" rtlCol="0" anchor="ctr">
+            <a:normAutofit/>
+          </a:bodyPr>
+          <a:lstStyle/>
+          <a:p>
+            <a:pPr algn="ctr" indent="0" marL="0">
+              <a:buNone/>
+            </a:pPr>
+            <a:r>
+              <a:rPr lang="en-US" sz="3600" b="1" dirty="0">
+                <a:solidFill>
+                  <a:srgbClr val="990011"/>
+                </a:solidFill>
+                <a:latin typeface="Times New Roman" pitchFamily="34" charset="0"/>
+                <a:ea typeface="Times New Roman" pitchFamily="34" charset="-122"/>
+                <a:cs typeface="Times New Roman" pitchFamily="34" charset="-120"/>
+              </a:rPr>
+              <a:t>Next Lesson</a:t>
+            </a:r>
+            <a:endParaRPr lang="en-US" sz="3600" dirty="0"/>
+          </a:p>
+        </p:txBody>
+      </p:sp>
+      <p:sp>
+        <p:nvSpPr>
+          <p:cNvPr id="5" name="Text 2"/>
+          <p:cNvSpPr/>
+          <p:nvPr/>
+        </p:nvSpPr>
+        <p:spPr>
+          <a:xfrm>
+            <a:off x="5349240" y="1783080"/>
+            <a:ext cx="6522415" cy="4663440"/>
+          </a:xfrm>
+          <a:prstGeom prst="rect">
+            <a:avLst/>
+          </a:prstGeom>
+          <a:noFill/>
+          <a:ln/>
+        </p:spPr>
+        <p:txBody>
+          <a:bodyPr wrap="square" lIns="0" tIns="0" rIns="0" bIns="0" rtlCol="0" anchor="ctr"/>
+          <a:lstStyle/>
+          <a:p>
+            <a:pPr algn="ctr" indent="0" marL="0">
+              <a:spcAft>
+                <a:spcPts val="800"/>
+              </a:spcAft>
+              <a:buNone/>
+            </a:pPr>
+            <a:r>
+              <a:rPr lang="en-US" sz="4000" b="1" dirty="0">
+                <a:solidFill>
+                  <a:srgbClr val="111111"/>
+                </a:solidFill>
+                <a:latin typeface="Times New Roman" pitchFamily="34" charset="0"/>
+                <a:ea typeface="Times New Roman" pitchFamily="34" charset="-122"/>
+                <a:cs typeface="Times New Roman" pitchFamily="34" charset="-120"/>
+              </a:rPr>
+              <a:t>Our next lesson will be on:</a:t>
+            </a:r>
+            <a:endParaRPr lang="en-US" sz="4000" dirty="0"/>
+          </a:p>
+          <a:p>
+            <a:pPr algn="ctr" indent="0" marL="0">
+              <a:spcAft>
+                <a:spcPts val="800"/>
+              </a:spcAft>
+              <a:buNone/>
+            </a:pPr>
+            <a:r>
+              <a:rPr lang="en-US" sz="4000" b="1" dirty="0">
+                <a:solidFill>
+                  <a:srgbClr val="990011"/>
+                </a:solidFill>
+                <a:latin typeface="Times New Roman" pitchFamily="34" charset="0"/>
+                <a:ea typeface="Times New Roman" pitchFamily="34" charset="-122"/>
+                <a:cs typeface="Times New Roman" pitchFamily="34" charset="-120"/>
+              </a:rPr>
+              <a:t>Lesson 36: The Impact of Agriculture on the Economy of Cameroon</a:t>
+            </a:r>
+            <a:endParaRPr lang="en-US" sz="4000" dirty="0"/>
+          </a:p>
+        </p:txBody>
+      </p:sp>
+      <p:sp>
+        <p:nvSpPr>
+          <p:cNvPr id="25" name="Slide Number Placeholder 0"/>
+          <p:cNvSpPr>
+            <a:spLocks noGrp="1"/>
+          </p:cNvSpPr>
+          <p:nvPr>
+            <p:ph type="sldNum" sz="quarter" idx="4294967295"/>
+          </p:nvPr>
+        </p:nvSpPr>
+        <p:spPr>
+          <a:xfrm>
+            <a:off x="27432" y="91440"/>
+            <a:ext cx="585216" cy="475488"/>
+          </a:xfrm>
+          <a:prstGeom prst="rect">
+            <a:avLst/>
+          </a:prstGeom>
+          <a:extLst>
+            <a:ext uri="{C572A759-6A51-4108-AA02-DFA0A04FC94B}">
+              <ma14:wrappingTextBoxFlag xmlns:ma14="http://schemas.microsoft.com/office/mac/drawingml/2011/main" val="0"/>
+            </a:ext>
+          </a:extLst>
+        </p:spPr>
+        <p:txBody>
+          <a:bodyPr/>
+          <a:lstStyle>
+            <a:lvl1pPr>
+              <a:defRPr sz="2000">
+                <a:solidFill>
+                  <a:srgbClr val="FFFFFF"/>
+                </a:solidFill>
+                <a:latin typeface="Calibri"/>
+                <a:ea typeface="Calibri"/>
+                <a:cs typeface="Calibri"/>
+              </a:defRPr>
+            </a:lvl1pPr>
+          </a:lstStyle>
+          <a:p>
+            <a:pPr algn="ctr"/>
+            <a:fld id="{F7021451-1387-4CA6-816F-3879F97B5CBC}" type="slidenum">
+              <a:rPr b="1" lang="en-US"/>
+              <a:t>47</a:t>
+            </a:fld>
+            <a:endParaRPr lang="en-US"/>
+          </a:p>
+        </p:txBody>
+      </p:sp>
+    </p:spTree>
+  </p:cSld>
+  <p:clrMapOvr>
+    <a:masterClrMapping/>
+  </p:clrMapOvr>
+</p:sld>
+</file>
+
+<file path=ppt/slides/slide48.xml><?xml version="1.0" encoding="utf-8"?>
+<p:sld xmlns:a="http://schemas.openxmlformats.org/drawingml/2006/main" xmlns:r="http://schemas.openxmlformats.org/officeDocument/2006/relationships" xmlns:p="http://schemas.openxmlformats.org/presentationml/2006/main">
+  <p:cSld name="Slide 48">
+    <p:spTree>
+      <p:nvGrpSpPr>
+        <p:cNvPr id="1" name=""/>
+        <p:cNvGrpSpPr/>
+        <p:nvPr/>
+      </p:nvGrpSpPr>
+      <p:grpSpPr>
+        <a:xfrm>
+          <a:off x="0" y="0"/>
+          <a:ext cx="0" cy="0"/>
+          <a:chOff x="0" y="0"/>
+          <a:chExt cx="0" cy="0"/>
+        </a:xfrm>
+      </p:grpSpPr>
+      <p:sp>
+        <p:nvSpPr>
+          <p:cNvPr id="2" name="Text 0"/>
+          <p:cNvSpPr/>
+          <p:nvPr/>
+        </p:nvSpPr>
+        <p:spPr>
+          <a:xfrm>
+            <a:off x="457200" y="713232"/>
+            <a:ext cx="11368735" cy="274320"/>
+          </a:xfrm>
+          <a:prstGeom prst="rect">
+            <a:avLst/>
+          </a:prstGeom>
+          <a:noFill/>
+          <a:ln/>
+        </p:spPr>
+        <p:txBody>
+          <a:bodyPr wrap="square" lIns="0" tIns="0" rIns="0" bIns="0" rtlCol="0" anchor="ctr"/>
+          <a:lstStyle/>
+          <a:p>
+            <a:pPr algn="r" indent="0" marL="0">
+              <a:buNone/>
+            </a:pPr>
+            <a:r>
+              <a:rPr lang="en-US" sz="1400" b="1" dirty="0">
+                <a:solidFill>
+                  <a:srgbClr val="1C3F6E"/>
+                </a:solidFill>
+                <a:latin typeface="Calibri" pitchFamily="34" charset="0"/>
+                <a:ea typeface="Calibri" pitchFamily="34" charset="-122"/>
+                <a:cs typeface="Calibri" pitchFamily="34" charset="-120"/>
+              </a:rPr>
               <a:t>BILINGUAL GAME</a:t>
             </a:r>
             <a:endParaRPr lang="en-US" sz="1400" dirty="0"/>
@@ -16334,7 +17271,7 @@
       </p:sp>
       <p:graphicFrame>
         <p:nvGraphicFramePr>
-          <p:cNvPr id="47" name="Table 0"/>
+          <p:cNvPr id="49" name="Table 0"/>
           <p:cNvGraphicFramePr>
             <a:graphicFrameLocks noGrp="1"/>
           </p:cNvGraphicFramePr>
@@ -17370,7 +18307,7 @@
             <a:pPr algn="ctr"/>
             <a:fld id="{F7021451-1387-4CA6-816F-3879F97B5CBC}" type="slidenum">
               <a:rPr b="1" lang="en-US"/>
-              <a:t>46</a:t>
+              <a:t>48</a:t>
             </a:fld>
             <a:endParaRPr lang="en-US"/>
           </a:p>
@@ -17384,9 +18321,9 @@
 </p:sld>
 </file>
 
-<file path=ppt/slides/slide47.xml><?xml version="1.0" encoding="utf-8"?>
+<file path=ppt/slides/slide49.xml><?xml version="1.0" encoding="utf-8"?>
 <p:sld xmlns:a="http://schemas.openxmlformats.org/drawingml/2006/main" xmlns:r="http://schemas.openxmlformats.org/officeDocument/2006/relationships" xmlns:p="http://schemas.openxmlformats.org/presentationml/2006/main">
-  <p:cSld name="Slide 47">
+  <p:cSld name="Slide 49">
     <p:spTree>
       <p:nvGrpSpPr>
         <p:cNvPr id="1" name=""/>
@@ -17481,7 +18418,7 @@
       </p:sp>
       <p:graphicFrame>
         <p:nvGraphicFramePr>
-          <p:cNvPr id="48" name="Table 0"/>
+          <p:cNvPr id="50" name="Table 0"/>
           <p:cNvGraphicFramePr>
             <a:graphicFrameLocks noGrp="1"/>
           </p:cNvGraphicFramePr>
@@ -18103,7 +19040,7 @@
             <a:pPr algn="ctr"/>
             <a:fld id="{F7021451-1387-4CA6-816F-3879F97B5CBC}" type="slidenum">
               <a:rPr b="1" lang="en-US"/>
-              <a:t>47</a:t>
+              <a:t>49</a:t>
             </a:fld>
             <a:endParaRPr lang="en-US"/>
           </a:p>
@@ -18117,9 +19054,9 @@
 </p:sld>
 </file>
 
-<file path=ppt/slides/slide48.xml><?xml version="1.0" encoding="utf-8"?>
+<file path=ppt/slides/slide5.xml><?xml version="1.0" encoding="utf-8"?>
 <p:sld xmlns:a="http://schemas.openxmlformats.org/drawingml/2006/main" xmlns:r="http://schemas.openxmlformats.org/officeDocument/2006/relationships" xmlns:p="http://schemas.openxmlformats.org/presentationml/2006/main">
-  <p:cSld name="Slide 48">
+  <p:cSld name="Slide 5">
     <p:spTree>
       <p:nvGrpSpPr>
         <p:cNvPr id="1" name=""/>
@@ -18167,6 +19104,225 @@
                 <a:ea typeface="Calibri" pitchFamily="34" charset="-122"/>
                 <a:cs typeface="Calibri" pitchFamily="34" charset="-120"/>
               </a:rPr>
+              <a:t>HOMEWORK CORRECTION</a:t>
+            </a:r>
+            <a:endParaRPr lang="en-US" sz="1400" dirty="0"/>
+          </a:p>
+        </p:txBody>
+      </p:sp>
+      <p:pic>
+        <p:nvPicPr>
+          <p:cNvPr id="3" name="Image 0" descr="/home/claude/f4/img/minesec_sheet.png">    </p:cNvPr>
+          <p:cNvPicPr>
+            <a:picLocks noChangeAspect="1"/>
+          </p:cNvPicPr>
+          <p:nvPr/>
+        </p:nvPicPr>
+        <p:blipFill>
+          <a:blip r:embed="rId1"/>
+          <a:stretch>
+            <a:fillRect/>
+          </a:stretch>
+        </p:blipFill>
+        <p:spPr>
+          <a:xfrm>
+            <a:off x="0" y="658368"/>
+            <a:ext cx="5120640" cy="5833872"/>
+          </a:xfrm>
+          <a:prstGeom prst="rect">
+            <a:avLst/>
+          </a:prstGeom>
+        </p:spPr>
+      </p:pic>
+      <p:sp>
+        <p:nvSpPr>
+          <p:cNvPr id="4" name="Text 1"/>
+          <p:cNvSpPr/>
+          <p:nvPr/>
+        </p:nvSpPr>
+        <p:spPr>
+          <a:xfrm>
+            <a:off x="5349240" y="1005840"/>
+            <a:ext cx="6522415" cy="731520"/>
+          </a:xfrm>
+          <a:prstGeom prst="rect">
+            <a:avLst/>
+          </a:prstGeom>
+          <a:noFill/>
+          <a:ln/>
+        </p:spPr>
+        <p:txBody>
+          <a:bodyPr wrap="square" lIns="0" tIns="0" rIns="0" bIns="0" rtlCol="0" anchor="ctr">
+            <a:normAutofit/>
+          </a:bodyPr>
+          <a:lstStyle/>
+          <a:p>
+            <a:pPr algn="ctr" indent="0" marL="0">
+              <a:buNone/>
+            </a:pPr>
+            <a:r>
+              <a:rPr lang="en-US" sz="3600" b="1" dirty="0">
+                <a:solidFill>
+                  <a:srgbClr val="990011"/>
+                </a:solidFill>
+                <a:latin typeface="Times New Roman" pitchFamily="34" charset="0"/>
+                <a:ea typeface="Times New Roman" pitchFamily="34" charset="-122"/>
+                <a:cs typeface="Times New Roman" pitchFamily="34" charset="-120"/>
+              </a:rPr>
+              <a:t>Correction: Possible Answer</a:t>
+            </a:r>
+            <a:endParaRPr lang="en-US" sz="3600" dirty="0"/>
+          </a:p>
+        </p:txBody>
+      </p:sp>
+      <p:sp>
+        <p:nvSpPr>
+          <p:cNvPr id="5" name="Text 2"/>
+          <p:cNvSpPr/>
+          <p:nvPr/>
+        </p:nvSpPr>
+        <p:spPr>
+          <a:xfrm>
+            <a:off x="5349240" y="1783080"/>
+            <a:ext cx="6522415" cy="4663440"/>
+          </a:xfrm>
+          <a:prstGeom prst="rect">
+            <a:avLst/>
+          </a:prstGeom>
+          <a:noFill/>
+          <a:ln/>
+        </p:spPr>
+        <p:txBody>
+          <a:bodyPr wrap="square" lIns="0" tIns="0" rIns="0" bIns="0" rtlCol="0" anchor="t"/>
+          <a:lstStyle/>
+          <a:p>
+            <a:pPr algn="l" indent="0" marL="0">
+              <a:spcAft>
+                <a:spcPts val="800"/>
+              </a:spcAft>
+              <a:buNone/>
+            </a:pPr>
+            <a:r>
+              <a:rPr lang="en-US" sz="4000" dirty="0">
+                <a:solidFill>
+                  <a:srgbClr val="111111"/>
+                </a:solidFill>
+                <a:latin typeface="Times New Roman" pitchFamily="34" charset="0"/>
+                <a:ea typeface="Times New Roman" pitchFamily="34" charset="-122"/>
+                <a:cs typeface="Times New Roman" pitchFamily="34" charset="-120"/>
+              </a:rPr>
+              <a:t>North Region: food crops – maize, sorghum, millet, groundnuts, onions; cash crops – cotton (also rice and onions sold).</a:t>
+            </a:r>
+            <a:endParaRPr lang="en-US" sz="4000" dirty="0"/>
+          </a:p>
+        </p:txBody>
+      </p:sp>
+      <p:sp>
+        <p:nvSpPr>
+          <p:cNvPr id="25" name="Slide Number Placeholder 0"/>
+          <p:cNvSpPr>
+            <a:spLocks noGrp="1"/>
+          </p:cNvSpPr>
+          <p:nvPr>
+            <p:ph type="sldNum" sz="quarter" idx="4294967295"/>
+          </p:nvPr>
+        </p:nvSpPr>
+        <p:spPr>
+          <a:xfrm>
+            <a:off x="27432" y="91440"/>
+            <a:ext cx="585216" cy="475488"/>
+          </a:xfrm>
+          <a:prstGeom prst="rect">
+            <a:avLst/>
+          </a:prstGeom>
+          <a:extLst>
+            <a:ext uri="{C572A759-6A51-4108-AA02-DFA0A04FC94B}">
+              <ma14:wrappingTextBoxFlag xmlns:ma14="http://schemas.microsoft.com/office/mac/drawingml/2011/main" val="0"/>
+            </a:ext>
+          </a:extLst>
+        </p:spPr>
+        <p:txBody>
+          <a:bodyPr/>
+          <a:lstStyle>
+            <a:lvl1pPr>
+              <a:defRPr sz="2000">
+                <a:solidFill>
+                  <a:srgbClr val="FFFFFF"/>
+                </a:solidFill>
+                <a:latin typeface="Calibri"/>
+                <a:ea typeface="Calibri"/>
+                <a:cs typeface="Calibri"/>
+              </a:defRPr>
+            </a:lvl1pPr>
+          </a:lstStyle>
+          <a:p>
+            <a:pPr algn="ctr"/>
+            <a:fld id="{F7021451-1387-4CA6-816F-3879F97B5CBC}" type="slidenum">
+              <a:rPr b="1" lang="en-US"/>
+              <a:t>5</a:t>
+            </a:fld>
+            <a:endParaRPr lang="en-US"/>
+          </a:p>
+        </p:txBody>
+      </p:sp>
+    </p:spTree>
+  </p:cSld>
+  <p:clrMapOvr>
+    <a:masterClrMapping/>
+  </p:clrMapOvr>
+</p:sld>
+</file>
+
+<file path=ppt/slides/slide50.xml><?xml version="1.0" encoding="utf-8"?>
+<p:sld xmlns:a="http://schemas.openxmlformats.org/drawingml/2006/main" xmlns:r="http://schemas.openxmlformats.org/officeDocument/2006/relationships" xmlns:p="http://schemas.openxmlformats.org/presentationml/2006/main">
+  <p:cSld name="Slide 50">
+    <p:spTree>
+      <p:nvGrpSpPr>
+        <p:cNvPr id="1" name=""/>
+        <p:cNvGrpSpPr/>
+        <p:nvPr/>
+      </p:nvGrpSpPr>
+      <p:grpSpPr>
+        <a:xfrm>
+          <a:off x="0" y="0"/>
+          <a:ext cx="0" cy="0"/>
+          <a:chOff x="0" y="0"/>
+          <a:chExt cx="0" cy="0"/>
+        </a:xfrm>
+      </p:grpSpPr>
+      <p:sp>
+        <p:nvSpPr>
+          <p:cNvPr id="2" name="Text 0"/>
+          <p:cNvSpPr/>
+          <p:nvPr/>
+        </p:nvSpPr>
+        <p:spPr>
+          <a:xfrm>
+            <a:off x="457200" y="713232"/>
+            <a:ext cx="11368735" cy="274320"/>
+          </a:xfrm>
+          <a:prstGeom prst="rect">
+            <a:avLst/>
+          </a:prstGeom>
+          <a:noFill/>
+          <a:ln/>
+        </p:spPr>
+        <p:txBody>
+          <a:bodyPr wrap="square" lIns="0" tIns="0" rIns="0" bIns="0" rtlCol="0" anchor="ctr"/>
+          <a:lstStyle/>
+          <a:p>
+            <a:pPr algn="r" indent="0" marL="0">
+              <a:buNone/>
+            </a:pPr>
+            <a:r>
+              <a:rPr lang="en-US" sz="1400" b="1" dirty="0">
+                <a:solidFill>
+                  <a:srgbClr val="1C3F6E"/>
+                </a:solidFill>
+                <a:latin typeface="Calibri" pitchFamily="34" charset="0"/>
+                <a:ea typeface="Calibri" pitchFamily="34" charset="-122"/>
+                <a:cs typeface="Calibri" pitchFamily="34" charset="-120"/>
+              </a:rPr>
               <a:t>LOGBOOK</a:t>
             </a:r>
             <a:endParaRPr lang="en-US" sz="1400" dirty="0"/>
@@ -18214,7 +19370,7 @@
       </p:sp>
       <p:graphicFrame>
         <p:nvGraphicFramePr>
-          <p:cNvPr id="49" name="Table 0"/>
+          <p:cNvPr id="51" name="Table 0"/>
           <p:cNvGraphicFramePr>
             <a:graphicFrameLocks noGrp="1"/>
           </p:cNvGraphicFramePr>
@@ -18324,7 +19480,7 @@
                           <a:ea typeface="Calibri" pitchFamily="34" charset="-122"/>
                           <a:cs typeface="Calibri" pitchFamily="34" charset="-120"/>
                         </a:rPr>
-                        <a:t>DEFINITIONS; Pastoral Nomadism and Transhumance; Ranching; Importance and Problems.</a:t>
+                        <a:t>DEFINITIONS; Pastoral Nomadism and Transhumance; Ranching; Importance; Problems.</a:t>
                       </a:r>
                       <a:endParaRPr lang="en-US" sz="1600" dirty="0">
                         <a:latin typeface="Calibri" charset="0"/>
@@ -18974,7 +20130,7 @@
             <a:pPr algn="ctr"/>
             <a:fld id="{F7021451-1387-4CA6-816F-3879F97B5CBC}" type="slidenum">
               <a:rPr b="1" lang="en-US"/>
-              <a:t>48</a:t>
+              <a:t>50</a:t>
             </a:fld>
             <a:endParaRPr lang="en-US"/>
           </a:p>
@@ -18988,9 +20144,9 @@
 </p:sld>
 </file>
 
-<file path=ppt/slides/slide49.xml><?xml version="1.0" encoding="utf-8"?>
+<file path=ppt/slides/slide51.xml><?xml version="1.0" encoding="utf-8"?>
 <p:sld xmlns:a="http://schemas.openxmlformats.org/drawingml/2006/main" xmlns:r="http://schemas.openxmlformats.org/officeDocument/2006/relationships" xmlns:p="http://schemas.openxmlformats.org/presentationml/2006/main">
-  <p:cSld name="Slide 49">
+  <p:cSld name="Slide 51">
     <p:spTree>
       <p:nvGrpSpPr>
         <p:cNvPr id="1" name=""/>
@@ -19320,7 +20476,7 @@
             <a:pPr algn="ctr"/>
             <a:fld id="{F7021451-1387-4CA6-816F-3879F97B5CBC}" type="slidenum">
               <a:rPr b="1" lang="en-US"/>
-              <a:t>49</a:t>
+              <a:t>51</a:t>
             </a:fld>
             <a:endParaRPr lang="en-US"/>
           </a:p>
@@ -19334,9 +20490,9 @@
 </p:sld>
 </file>
 
-<file path=ppt/slides/slide5.xml><?xml version="1.0" encoding="utf-8"?>
+<file path=ppt/slides/slide52.xml><?xml version="1.0" encoding="utf-8"?>
 <p:sld xmlns:a="http://schemas.openxmlformats.org/drawingml/2006/main" xmlns:r="http://schemas.openxmlformats.org/officeDocument/2006/relationships" xmlns:p="http://schemas.openxmlformats.org/presentationml/2006/main">
-  <p:cSld name="Slide 5">
+  <p:cSld name="Slide 52">
     <p:spTree>
       <p:nvGrpSpPr>
         <p:cNvPr id="1" name=""/>
@@ -19384,7 +20540,7 @@
                 <a:ea typeface="Calibri" pitchFamily="34" charset="-122"/>
                 <a:cs typeface="Calibri" pitchFamily="34" charset="-120"/>
               </a:rPr>
-              <a:t>HOMEWORK CORRECTION</a:t>
+              <a:t>REFERENCES</a:t>
             </a:r>
             <a:endParaRPr lang="en-US" sz="1400" dirty="0"/>
           </a:p>
@@ -19407,7 +20563,7 @@
         <p:spPr>
           <a:xfrm>
             <a:off x="0" y="658368"/>
-            <a:ext cx="5120640" cy="5833872"/>
+            <a:ext cx="3840480" cy="5833872"/>
           </a:xfrm>
           <a:prstGeom prst="rect">
             <a:avLst/>
@@ -19422,8 +20578,8 @@
         </p:nvSpPr>
         <p:spPr>
           <a:xfrm>
-            <a:off x="5349240" y="1005840"/>
-            <a:ext cx="6522415" cy="731520"/>
+            <a:off x="4069080" y="1005840"/>
+            <a:ext cx="7802575" cy="731520"/>
           </a:xfrm>
           <a:prstGeom prst="rect">
             <a:avLst/>
@@ -19449,7 +20605,7 @@
                 <a:ea typeface="Times New Roman" pitchFamily="34" charset="-122"/>
                 <a:cs typeface="Times New Roman" pitchFamily="34" charset="-120"/>
               </a:rPr>
-              <a:t>Correction: Possible Answer</a:t>
+              <a:t>References</a:t>
             </a:r>
             <a:endParaRPr lang="en-US" sz="3600" dirty="0"/>
           </a:p>
@@ -19463,8 +20619,8 @@
         </p:nvSpPr>
         <p:spPr>
           <a:xfrm>
-            <a:off x="5349240" y="1783080"/>
-            <a:ext cx="6522415" cy="4663440"/>
+            <a:off x="4069080" y="1783080"/>
+            <a:ext cx="7802575" cy="4663440"/>
           </a:xfrm>
           <a:prstGeom prst="rect">
             <a:avLst/>
@@ -19476,24 +20632,130 @@
           <a:bodyPr wrap="square" lIns="0" tIns="0" rIns="0" bIns="0" rtlCol="0" anchor="t"/>
           <a:lstStyle/>
           <a:p>
-            <a:pPr algn="l" indent="0" marL="0">
+            <a:pPr algn="l" marL="342900" indent="-342900">
               <a:spcAft>
                 <a:spcPts val="800"/>
               </a:spcAft>
-              <a:buNone/>
+              <a:buSzPct val="100000"/>
+              <a:buChar char="•"/>
             </a:pPr>
             <a:r>
-              <a:rPr lang="en-US" sz="4000" dirty="0">
+              <a:rPr lang="en-US" sz="1800" dirty="0">
                 <a:solidFill>
                   <a:srgbClr val="111111"/>
                 </a:solidFill>
-                <a:latin typeface="Times New Roman" pitchFamily="34" charset="0"/>
-                <a:ea typeface="Times New Roman" pitchFamily="34" charset="-122"/>
-                <a:cs typeface="Times New Roman" pitchFamily="34" charset="-120"/>
+                <a:latin typeface="Calibri" pitchFamily="34" charset="0"/>
+                <a:ea typeface="Calibri" pitchFamily="34" charset="-122"/>
+                <a:cs typeface="Calibri" pitchFamily="34" charset="-120"/>
               </a:rPr>
-              <a:t>North Region: food crops – maize, sorghum, millet, groundnuts, onions; cash crops – cotton (also rice and onions sold).</a:t>
-            </a:r>
-            <a:endParaRPr lang="en-US" sz="4000" dirty="0"/>
+              <a:t>Geography Syllabus, Forms I–V, MINESEC (2023) — Form 4, Module II: Development and the Management of Primary Resources.</a:t>
+            </a:r>
+            <a:endParaRPr lang="en-US" sz="1800" dirty="0"/>
+          </a:p>
+          <a:p>
+            <a:pPr algn="l" marL="342900" indent="-342900">
+              <a:spcAft>
+                <a:spcPts val="800"/>
+              </a:spcAft>
+              <a:buSzPct val="100000"/>
+              <a:buChar char="•"/>
+            </a:pPr>
+            <a:r>
+              <a:rPr lang="en-US" sz="1800" dirty="0">
+                <a:solidFill>
+                  <a:srgbClr val="111111"/>
+                </a:solidFill>
+                <a:latin typeface="Calibri" pitchFamily="34" charset="0"/>
+                <a:ea typeface="Calibri" pitchFamily="34" charset="-122"/>
+                <a:cs typeface="Calibri" pitchFamily="34" charset="-120"/>
+              </a:rPr>
+              <a:t>Photo, Activity 1: “A roadside stop for souvenirs &amp; exploring dry wells, Northern Sahara, ” by ali eminov, CC BY-NC 2.0, via Flickr (https://www.flickr.com/photos/27435717@N00/3437516165)</a:t>
+            </a:r>
+            <a:endParaRPr lang="en-US" sz="1800" dirty="0"/>
+          </a:p>
+          <a:p>
+            <a:pPr algn="l" marL="342900" indent="-342900">
+              <a:spcAft>
+                <a:spcPts val="800"/>
+              </a:spcAft>
+              <a:buSzPct val="100000"/>
+              <a:buChar char="•"/>
+            </a:pPr>
+            <a:r>
+              <a:rPr lang="en-US" sz="1800" dirty="0">
+                <a:solidFill>
+                  <a:srgbClr val="111111"/>
+                </a:solidFill>
+                <a:latin typeface="Calibri" pitchFamily="34" charset="0"/>
+                <a:ea typeface="Calibri" pitchFamily="34" charset="-122"/>
+                <a:cs typeface="Calibri" pitchFamily="34" charset="-120"/>
+              </a:rPr>
+              <a:t>Photo, Activity 3: “The Flock” by seefit, CC BY 2.0, via Flickr (https://www.flickr.com/photos/76574551@N00/20928299362)</a:t>
+            </a:r>
+            <a:endParaRPr lang="en-US" sz="1800" dirty="0"/>
+          </a:p>
+          <a:p>
+            <a:pPr algn="l" marL="342900" indent="-342900">
+              <a:spcAft>
+                <a:spcPts val="800"/>
+              </a:spcAft>
+              <a:buSzPct val="100000"/>
+              <a:buChar char="•"/>
+            </a:pPr>
+            <a:r>
+              <a:rPr lang="en-US" sz="1800" dirty="0">
+                <a:solidFill>
+                  <a:srgbClr val="111111"/>
+                </a:solidFill>
+                <a:latin typeface="Calibri" pitchFamily="34" charset="0"/>
+                <a:ea typeface="Calibri" pitchFamily="34" charset="-122"/>
+                <a:cs typeface="Calibri" pitchFamily="34" charset="-120"/>
+              </a:rPr>
+              <a:t>Photo, Activity 4: “Discussing the price” by 10b travelling / Carsten ten Brink, CC BY-NC-ND 2.0, via Flickr (https://www.flickr.com/photos/77334245@N00/7313656038)</a:t>
+            </a:r>
+            <a:endParaRPr lang="en-US" sz="1800" dirty="0"/>
+          </a:p>
+          <a:p>
+            <a:pPr algn="l" marL="342900" indent="-342900">
+              <a:spcAft>
+                <a:spcPts val="800"/>
+              </a:spcAft>
+              <a:buSzPct val="100000"/>
+              <a:buChar char="•"/>
+            </a:pPr>
+            <a:r>
+              <a:rPr lang="en-US" sz="1800" dirty="0">
+                <a:solidFill>
+                  <a:srgbClr val="111111"/>
+                </a:solidFill>
+                <a:latin typeface="Calibri" pitchFamily="34" charset="0"/>
+                <a:ea typeface="Calibri" pitchFamily="34" charset="-122"/>
+                <a:cs typeface="Calibri" pitchFamily="34" charset="-120"/>
+              </a:rPr>
+              <a:t>Photo, Activity 5: “Acacia Tree” by D-Stanley, CC BY 2.0, via Flickr (https://www.flickr.com/photos/79721788@N00/11527335486)</a:t>
+            </a:r>
+            <a:endParaRPr lang="en-US" sz="1800" dirty="0"/>
+          </a:p>
+          <a:p>
+            <a:pPr algn="l" marL="342900" indent="-342900">
+              <a:spcAft>
+                <a:spcPts val="800"/>
+              </a:spcAft>
+              <a:buSzPct val="100000"/>
+              <a:buChar char="•"/>
+            </a:pPr>
+            <a:r>
+              <a:rPr lang="en-US" sz="1800" dirty="0">
+                <a:solidFill>
+                  <a:srgbClr val="111111"/>
+                </a:solidFill>
+                <a:latin typeface="Calibri" pitchFamily="34" charset="0"/>
+                <a:ea typeface="Calibri" pitchFamily="34" charset="-122"/>
+                <a:cs typeface="Calibri" pitchFamily="34" charset="-120"/>
+              </a:rPr>
+              <a:t>Diagrams and animations: drawn for this lesson (Geography Department).</a:t>
+            </a:r>
+            <a:endParaRPr lang="en-US" sz="1800" dirty="0"/>
           </a:p>
         </p:txBody>
       </p:sp>
@@ -19539,332 +20801,7 @@
             <a:pPr algn="ctr"/>
             <a:fld id="{F7021451-1387-4CA6-816F-3879F97B5CBC}" type="slidenum">
               <a:rPr b="1" lang="en-US"/>
-              <a:t>5</a:t>
-            </a:fld>
-            <a:endParaRPr lang="en-US"/>
-          </a:p>
-        </p:txBody>
-      </p:sp>
-    </p:spTree>
-  </p:cSld>
-  <p:clrMapOvr>
-    <a:masterClrMapping/>
-  </p:clrMapOvr>
-</p:sld>
-</file>
-
-<file path=ppt/slides/slide50.xml><?xml version="1.0" encoding="utf-8"?>
-<p:sld xmlns:a="http://schemas.openxmlformats.org/drawingml/2006/main" xmlns:r="http://schemas.openxmlformats.org/officeDocument/2006/relationships" xmlns:p="http://schemas.openxmlformats.org/presentationml/2006/main">
-  <p:cSld name="Slide 50">
-    <p:spTree>
-      <p:nvGrpSpPr>
-        <p:cNvPr id="1" name=""/>
-        <p:cNvGrpSpPr/>
-        <p:nvPr/>
-      </p:nvGrpSpPr>
-      <p:grpSpPr>
-        <a:xfrm>
-          <a:off x="0" y="0"/>
-          <a:ext cx="0" cy="0"/>
-          <a:chOff x="0" y="0"/>
-          <a:chExt cx="0" cy="0"/>
-        </a:xfrm>
-      </p:grpSpPr>
-      <p:sp>
-        <p:nvSpPr>
-          <p:cNvPr id="2" name="Text 0"/>
-          <p:cNvSpPr/>
-          <p:nvPr/>
-        </p:nvSpPr>
-        <p:spPr>
-          <a:xfrm>
-            <a:off x="457200" y="713232"/>
-            <a:ext cx="11368735" cy="274320"/>
-          </a:xfrm>
-          <a:prstGeom prst="rect">
-            <a:avLst/>
-          </a:prstGeom>
-          <a:noFill/>
-          <a:ln/>
-        </p:spPr>
-        <p:txBody>
-          <a:bodyPr wrap="square" lIns="0" tIns="0" rIns="0" bIns="0" rtlCol="0" anchor="ctr"/>
-          <a:lstStyle/>
-          <a:p>
-            <a:pPr algn="r" indent="0" marL="0">
-              <a:buNone/>
-            </a:pPr>
-            <a:r>
-              <a:rPr lang="en-US" sz="1400" b="1" dirty="0">
-                <a:solidFill>
-                  <a:srgbClr val="1C3F6E"/>
-                </a:solidFill>
-                <a:latin typeface="Calibri" pitchFamily="34" charset="0"/>
-                <a:ea typeface="Calibri" pitchFamily="34" charset="-122"/>
-                <a:cs typeface="Calibri" pitchFamily="34" charset="-120"/>
-              </a:rPr>
-              <a:t>REFERENCES</a:t>
-            </a:r>
-            <a:endParaRPr lang="en-US" sz="1400" dirty="0"/>
-          </a:p>
-        </p:txBody>
-      </p:sp>
-      <p:pic>
-        <p:nvPicPr>
-          <p:cNvPr id="3" name="Image 0" descr="/home/claude/f4/img/minesec_sheet.png">    </p:cNvPr>
-          <p:cNvPicPr>
-            <a:picLocks noChangeAspect="1"/>
-          </p:cNvPicPr>
-          <p:nvPr/>
-        </p:nvPicPr>
-        <p:blipFill>
-          <a:blip r:embed="rId1"/>
-          <a:stretch>
-            <a:fillRect/>
-          </a:stretch>
-        </p:blipFill>
-        <p:spPr>
-          <a:xfrm>
-            <a:off x="0" y="658368"/>
-            <a:ext cx="3840480" cy="5833872"/>
-          </a:xfrm>
-          <a:prstGeom prst="rect">
-            <a:avLst/>
-          </a:prstGeom>
-        </p:spPr>
-      </p:pic>
-      <p:sp>
-        <p:nvSpPr>
-          <p:cNvPr id="4" name="Text 1"/>
-          <p:cNvSpPr/>
-          <p:nvPr/>
-        </p:nvSpPr>
-        <p:spPr>
-          <a:xfrm>
-            <a:off x="4069080" y="1005840"/>
-            <a:ext cx="7802575" cy="731520"/>
-          </a:xfrm>
-          <a:prstGeom prst="rect">
-            <a:avLst/>
-          </a:prstGeom>
-          <a:noFill/>
-          <a:ln/>
-        </p:spPr>
-        <p:txBody>
-          <a:bodyPr wrap="square" lIns="0" tIns="0" rIns="0" bIns="0" rtlCol="0" anchor="ctr">
-            <a:normAutofit/>
-          </a:bodyPr>
-          <a:lstStyle/>
-          <a:p>
-            <a:pPr algn="ctr" indent="0" marL="0">
-              <a:buNone/>
-            </a:pPr>
-            <a:r>
-              <a:rPr lang="en-US" sz="3600" b="1" dirty="0">
-                <a:solidFill>
-                  <a:srgbClr val="990011"/>
-                </a:solidFill>
-                <a:latin typeface="Times New Roman" pitchFamily="34" charset="0"/>
-                <a:ea typeface="Times New Roman" pitchFamily="34" charset="-122"/>
-                <a:cs typeface="Times New Roman" pitchFamily="34" charset="-120"/>
-              </a:rPr>
-              <a:t>References</a:t>
-            </a:r>
-            <a:endParaRPr lang="en-US" sz="3600" dirty="0"/>
-          </a:p>
-        </p:txBody>
-      </p:sp>
-      <p:sp>
-        <p:nvSpPr>
-          <p:cNvPr id="5" name="Text 2"/>
-          <p:cNvSpPr/>
-          <p:nvPr/>
-        </p:nvSpPr>
-        <p:spPr>
-          <a:xfrm>
-            <a:off x="4069080" y="1783080"/>
-            <a:ext cx="7802575" cy="4663440"/>
-          </a:xfrm>
-          <a:prstGeom prst="rect">
-            <a:avLst/>
-          </a:prstGeom>
-          <a:noFill/>
-          <a:ln/>
-        </p:spPr>
-        <p:txBody>
-          <a:bodyPr wrap="square" lIns="0" tIns="0" rIns="0" bIns="0" rtlCol="0" anchor="t"/>
-          <a:lstStyle/>
-          <a:p>
-            <a:pPr algn="l" marL="342900" indent="-342900">
-              <a:spcAft>
-                <a:spcPts val="800"/>
-              </a:spcAft>
-              <a:buSzPct val="100000"/>
-              <a:buChar char="•"/>
-            </a:pPr>
-            <a:r>
-              <a:rPr lang="en-US" sz="1800" dirty="0">
-                <a:solidFill>
-                  <a:srgbClr val="111111"/>
-                </a:solidFill>
-                <a:latin typeface="Calibri" pitchFamily="34" charset="0"/>
-                <a:ea typeface="Calibri" pitchFamily="34" charset="-122"/>
-                <a:cs typeface="Calibri" pitchFamily="34" charset="-120"/>
-              </a:rPr>
-              <a:t>Geography Syllabus, Forms I–V, MINESEC (2023) — Form 4, Module II: Development and the Management of Primary Resources.</a:t>
-            </a:r>
-            <a:endParaRPr lang="en-US" sz="1800" dirty="0"/>
-          </a:p>
-          <a:p>
-            <a:pPr algn="l" marL="342900" indent="-342900">
-              <a:spcAft>
-                <a:spcPts val="800"/>
-              </a:spcAft>
-              <a:buSzPct val="100000"/>
-              <a:buChar char="•"/>
-            </a:pPr>
-            <a:r>
-              <a:rPr lang="en-US" sz="1800" dirty="0">
-                <a:solidFill>
-                  <a:srgbClr val="111111"/>
-                </a:solidFill>
-                <a:latin typeface="Calibri" pitchFamily="34" charset="0"/>
-                <a:ea typeface="Calibri" pitchFamily="34" charset="-122"/>
-                <a:cs typeface="Calibri" pitchFamily="34" charset="-120"/>
-              </a:rPr>
-              <a:t>Photo, Activity 1: “A roadside stop for souvenirs &amp; exploring dry wells, Northern Sahara, ” by ali eminov, CC BY-NC 2.0, via Flickr (https://www.flickr.com/photos/27435717@N00/3437516165)</a:t>
-            </a:r>
-            <a:endParaRPr lang="en-US" sz="1800" dirty="0"/>
-          </a:p>
-          <a:p>
-            <a:pPr algn="l" marL="342900" indent="-342900">
-              <a:spcAft>
-                <a:spcPts val="800"/>
-              </a:spcAft>
-              <a:buSzPct val="100000"/>
-              <a:buChar char="•"/>
-            </a:pPr>
-            <a:r>
-              <a:rPr lang="en-US" sz="1800" dirty="0">
-                <a:solidFill>
-                  <a:srgbClr val="111111"/>
-                </a:solidFill>
-                <a:latin typeface="Calibri" pitchFamily="34" charset="0"/>
-                <a:ea typeface="Calibri" pitchFamily="34" charset="-122"/>
-                <a:cs typeface="Calibri" pitchFamily="34" charset="-120"/>
-              </a:rPr>
-              <a:t>Photo, Activity 3: “The Flock” by seefit, CC BY 2.0, via Flickr (https://www.flickr.com/photos/76574551@N00/20928299362)</a:t>
-            </a:r>
-            <a:endParaRPr lang="en-US" sz="1800" dirty="0"/>
-          </a:p>
-          <a:p>
-            <a:pPr algn="l" marL="342900" indent="-342900">
-              <a:spcAft>
-                <a:spcPts val="800"/>
-              </a:spcAft>
-              <a:buSzPct val="100000"/>
-              <a:buChar char="•"/>
-            </a:pPr>
-            <a:r>
-              <a:rPr lang="en-US" sz="1800" dirty="0">
-                <a:solidFill>
-                  <a:srgbClr val="111111"/>
-                </a:solidFill>
-                <a:latin typeface="Calibri" pitchFamily="34" charset="0"/>
-                <a:ea typeface="Calibri" pitchFamily="34" charset="-122"/>
-                <a:cs typeface="Calibri" pitchFamily="34" charset="-120"/>
-              </a:rPr>
-              <a:t>Photo, Activity 4: “Discussing the price” by 10b travelling / Carsten ten Brink, CC BY-NC-ND 2.0, via Flickr (https://www.flickr.com/photos/77334245@N00/7313656038)</a:t>
-            </a:r>
-            <a:endParaRPr lang="en-US" sz="1800" dirty="0"/>
-          </a:p>
-          <a:p>
-            <a:pPr algn="l" marL="342900" indent="-342900">
-              <a:spcAft>
-                <a:spcPts val="800"/>
-              </a:spcAft>
-              <a:buSzPct val="100000"/>
-              <a:buChar char="•"/>
-            </a:pPr>
-            <a:r>
-              <a:rPr lang="en-US" sz="1800" dirty="0">
-                <a:solidFill>
-                  <a:srgbClr val="111111"/>
-                </a:solidFill>
-                <a:latin typeface="Calibri" pitchFamily="34" charset="0"/>
-                <a:ea typeface="Calibri" pitchFamily="34" charset="-122"/>
-                <a:cs typeface="Calibri" pitchFamily="34" charset="-120"/>
-              </a:rPr>
-              <a:t>Photo, Activity 5: “Acacia Tree” by D-Stanley, CC BY 2.0, via Flickr (https://www.flickr.com/photos/79721788@N00/11527335486)</a:t>
-            </a:r>
-            <a:endParaRPr lang="en-US" sz="1800" dirty="0"/>
-          </a:p>
-          <a:p>
-            <a:pPr algn="l" marL="342900" indent="-342900">
-              <a:spcAft>
-                <a:spcPts val="800"/>
-              </a:spcAft>
-              <a:buSzPct val="100000"/>
-              <a:buChar char="•"/>
-            </a:pPr>
-            <a:r>
-              <a:rPr lang="en-US" sz="1800" dirty="0">
-                <a:solidFill>
-                  <a:srgbClr val="111111"/>
-                </a:solidFill>
-                <a:latin typeface="Calibri" pitchFamily="34" charset="0"/>
-                <a:ea typeface="Calibri" pitchFamily="34" charset="-122"/>
-                <a:cs typeface="Calibri" pitchFamily="34" charset="-120"/>
-              </a:rPr>
-              <a:t>Diagrams and animations: drawn for this lesson (Geography Department).</a:t>
-            </a:r>
-            <a:endParaRPr lang="en-US" sz="1800" dirty="0"/>
-          </a:p>
-        </p:txBody>
-      </p:sp>
-      <p:sp>
-        <p:nvSpPr>
-          <p:cNvPr id="25" name="Slide Number Placeholder 0"/>
-          <p:cNvSpPr>
-            <a:spLocks noGrp="1"/>
-          </p:cNvSpPr>
-          <p:nvPr>
-            <p:ph type="sldNum" sz="quarter" idx="4294967295"/>
-          </p:nvPr>
-        </p:nvSpPr>
-        <p:spPr>
-          <a:xfrm>
-            <a:off x="27432" y="91440"/>
-            <a:ext cx="585216" cy="475488"/>
-          </a:xfrm>
-          <a:prstGeom prst="rect">
-            <a:avLst/>
-          </a:prstGeom>
-          <a:extLst>
-            <a:ext uri="{C572A759-6A51-4108-AA02-DFA0A04FC94B}">
-              <ma14:wrappingTextBoxFlag xmlns:ma14="http://schemas.microsoft.com/office/mac/drawingml/2011/main" val="0"/>
-            </a:ext>
-          </a:extLst>
-        </p:spPr>
-        <p:txBody>
-          <a:bodyPr/>
-          <a:lstStyle>
-            <a:lvl1pPr>
-              <a:defRPr sz="2000">
-                <a:solidFill>
-                  <a:srgbClr val="FFFFFF"/>
-                </a:solidFill>
-                <a:latin typeface="Calibri"/>
-                <a:ea typeface="Calibri"/>
-                <a:cs typeface="Calibri"/>
-              </a:defRPr>
-            </a:lvl1pPr>
-          </a:lstStyle>
-          <a:p>
-            <a:pPr algn="ctr"/>
-            <a:fld id="{F7021451-1387-4CA6-816F-3879F97B5CBC}" type="slidenum">
-              <a:rPr b="1" lang="en-US"/>
-              <a:t>50</a:t>
+              <a:t>52</a:t>
             </a:fld>
             <a:endParaRPr lang="en-US"/>
           </a:p>
